--- a/Pregrado/Trabajo de grado 3/Clases/Sesion 05 - Diseño de instrumento · desarrollo metodológico/Presentacion.pptx
+++ b/Pregrado/Trabajo de grado 3/Clases/Sesion 05 - Diseño de instrumento · desarrollo metodológico/Presentacion.pptx
@@ -3366,41 +3366,6 @@
                 <a:latin typeface="Calibri"/>
               </a:rPr>
               <a:t> TRABAJO DE GRADO 3</a:t>
-            </a:r>
-          </a:p>
-        </p:txBody>
-      </p:sp>
-      <p:sp>
-        <p:nvSpPr>
-          <p:cNvPr id="7" name="TextBox 6"/>
-          <p:cNvSpPr txBox="1"/>
-          <p:nvPr/>
-        </p:nvSpPr>
-        <p:spPr>
-          <a:xfrm>
-            <a:off x="2194560" y="6446520"/>
-            <a:ext cx="5943600" cy="274320"/>
-          </a:xfrm>
-          <a:prstGeom prst="rect">
-            <a:avLst/>
-          </a:prstGeom>
-          <a:noFill/>
-        </p:spPr>
-        <p:txBody>
-          <a:bodyPr wrap="square" anchor="t" lIns="0" rIns="0" tIns="0" bIns="0">
-            <a:spAutoFit/>
-          </a:bodyPr>
-          <a:lstStyle/>
-          <a:p>
-            <a:pPr algn="l"/>
-            <a:r>
-              <a:rPr sz="1000" b="1" i="0">
-                <a:solidFill>
-                  <a:srgbClr val="8F989D"/>
-                </a:solidFill>
-                <a:latin typeface="Calibri"/>
-              </a:rPr>
-              <a:t>Inicio 5:10 pm</a:t>
             </a:r>
           </a:p>
         </p:txBody>
@@ -4144,41 +4109,6 @@
         </p:nvSpPr>
         <p:spPr>
           <a:xfrm>
-            <a:off x="2194560" y="6446520"/>
-            <a:ext cx="5943600" cy="274320"/>
-          </a:xfrm>
-          <a:prstGeom prst="rect">
-            <a:avLst/>
-          </a:prstGeom>
-          <a:noFill/>
-        </p:spPr>
-        <p:txBody>
-          <a:bodyPr wrap="square" anchor="t" lIns="0" rIns="0" tIns="0" bIns="0">
-            <a:spAutoFit/>
-          </a:bodyPr>
-          <a:lstStyle/>
-          <a:p>
-            <a:pPr algn="l"/>
-            <a:r>
-              <a:rPr sz="1000" b="1" i="0">
-                <a:solidFill>
-                  <a:srgbClr val="8F989D"/>
-                </a:solidFill>
-                <a:latin typeface="Calibri"/>
-              </a:rPr>
-              <a:t>Inicio 5:10 pm</a:t>
-            </a:r>
-          </a:p>
-        </p:txBody>
-      </p:sp>
-      <p:sp>
-        <p:nvSpPr>
-          <p:cNvPr id="7" name="TextBox 6"/>
-          <p:cNvSpPr txBox="1"/>
-          <p:nvPr/>
-        </p:nvSpPr>
-        <p:spPr>
-          <a:xfrm>
             <a:off x="11094415" y="6446520"/>
             <a:ext cx="548640" cy="274320"/>
           </a:xfrm>
@@ -4585,41 +4515,6 @@
         </p:nvSpPr>
         <p:spPr>
           <a:xfrm>
-            <a:off x="2194560" y="6446520"/>
-            <a:ext cx="5943600" cy="274320"/>
-          </a:xfrm>
-          <a:prstGeom prst="rect">
-            <a:avLst/>
-          </a:prstGeom>
-          <a:noFill/>
-        </p:spPr>
-        <p:txBody>
-          <a:bodyPr wrap="square" anchor="t" lIns="0" rIns="0" tIns="0" bIns="0">
-            <a:spAutoFit/>
-          </a:bodyPr>
-          <a:lstStyle/>
-          <a:p>
-            <a:pPr algn="l"/>
-            <a:r>
-              <a:rPr sz="1000" b="1" i="0">
-                <a:solidFill>
-                  <a:srgbClr val="8F989D"/>
-                </a:solidFill>
-                <a:latin typeface="Calibri"/>
-              </a:rPr>
-              <a:t>Inicio 5:10 pm</a:t>
-            </a:r>
-          </a:p>
-        </p:txBody>
-      </p:sp>
-      <p:sp>
-        <p:nvSpPr>
-          <p:cNvPr id="6" name="TextBox 5"/>
-          <p:cNvSpPr txBox="1"/>
-          <p:nvPr/>
-        </p:nvSpPr>
-        <p:spPr>
-          <a:xfrm>
             <a:off x="11094415" y="6446520"/>
             <a:ext cx="548640" cy="274320"/>
           </a:xfrm>
@@ -5087,41 +4982,6 @@
         </p:nvSpPr>
         <p:spPr>
           <a:xfrm>
-            <a:off x="2194560" y="6446520"/>
-            <a:ext cx="5943600" cy="274320"/>
-          </a:xfrm>
-          <a:prstGeom prst="rect">
-            <a:avLst/>
-          </a:prstGeom>
-          <a:noFill/>
-        </p:spPr>
-        <p:txBody>
-          <a:bodyPr wrap="square" anchor="t" lIns="0" rIns="0" tIns="0" bIns="0">
-            <a:spAutoFit/>
-          </a:bodyPr>
-          <a:lstStyle/>
-          <a:p>
-            <a:pPr algn="l"/>
-            <a:r>
-              <a:rPr sz="1000" b="1" i="0">
-                <a:solidFill>
-                  <a:srgbClr val="8F989D"/>
-                </a:solidFill>
-                <a:latin typeface="Calibri"/>
-              </a:rPr>
-              <a:t>Inicio 5:10 pm</a:t>
-            </a:r>
-          </a:p>
-        </p:txBody>
-      </p:sp>
-      <p:sp>
-        <p:nvSpPr>
-          <p:cNvPr id="11" name="TextBox 10"/>
-          <p:cNvSpPr txBox="1"/>
-          <p:nvPr/>
-        </p:nvSpPr>
-        <p:spPr>
-          <a:xfrm>
             <a:off x="11094415" y="6446520"/>
             <a:ext cx="548640" cy="274320"/>
           </a:xfrm>
@@ -5486,41 +5346,6 @@
         </p:nvSpPr>
         <p:spPr>
           <a:xfrm>
-            <a:off x="2194560" y="6446520"/>
-            <a:ext cx="5943600" cy="274320"/>
-          </a:xfrm>
-          <a:prstGeom prst="rect">
-            <a:avLst/>
-          </a:prstGeom>
-          <a:noFill/>
-        </p:spPr>
-        <p:txBody>
-          <a:bodyPr wrap="square" anchor="t" lIns="0" rIns="0" tIns="0" bIns="0">
-            <a:spAutoFit/>
-          </a:bodyPr>
-          <a:lstStyle/>
-          <a:p>
-            <a:pPr algn="l"/>
-            <a:r>
-              <a:rPr sz="1000" b="1" i="0">
-                <a:solidFill>
-                  <a:srgbClr val="8F989D"/>
-                </a:solidFill>
-                <a:latin typeface="Calibri"/>
-              </a:rPr>
-              <a:t>Inicio 5:10 pm</a:t>
-            </a:r>
-          </a:p>
-        </p:txBody>
-      </p:sp>
-      <p:sp>
-        <p:nvSpPr>
-          <p:cNvPr id="9" name="TextBox 8"/>
-          <p:cNvSpPr txBox="1"/>
-          <p:nvPr/>
-        </p:nvSpPr>
-        <p:spPr>
-          <a:xfrm>
             <a:off x="11094415" y="6446520"/>
             <a:ext cx="548640" cy="274320"/>
           </a:xfrm>
@@ -5997,41 +5822,6 @@
         </p:nvSpPr>
         <p:spPr>
           <a:xfrm>
-            <a:off x="2194560" y="6446520"/>
-            <a:ext cx="5943600" cy="274320"/>
-          </a:xfrm>
-          <a:prstGeom prst="rect">
-            <a:avLst/>
-          </a:prstGeom>
-          <a:noFill/>
-        </p:spPr>
-        <p:txBody>
-          <a:bodyPr wrap="square" anchor="t" lIns="0" rIns="0" tIns="0" bIns="0">
-            <a:spAutoFit/>
-          </a:bodyPr>
-          <a:lstStyle/>
-          <a:p>
-            <a:pPr algn="l"/>
-            <a:r>
-              <a:rPr sz="1000" b="1" i="0">
-                <a:solidFill>
-                  <a:srgbClr val="8F989D"/>
-                </a:solidFill>
-                <a:latin typeface="Calibri"/>
-              </a:rPr>
-              <a:t>Inicio 5:10 pm</a:t>
-            </a:r>
-          </a:p>
-        </p:txBody>
-      </p:sp>
-      <p:sp>
-        <p:nvSpPr>
-          <p:cNvPr id="11" name="TextBox 10"/>
-          <p:cNvSpPr txBox="1"/>
-          <p:nvPr/>
-        </p:nvSpPr>
-        <p:spPr>
-          <a:xfrm>
             <a:off x="11094415" y="6446520"/>
             <a:ext cx="548640" cy="274320"/>
           </a:xfrm>
@@ -6360,41 +6150,6 @@
         </p:nvSpPr>
         <p:spPr>
           <a:xfrm>
-            <a:off x="2194560" y="6446520"/>
-            <a:ext cx="5943600" cy="274320"/>
-          </a:xfrm>
-          <a:prstGeom prst="rect">
-            <a:avLst/>
-          </a:prstGeom>
-          <a:noFill/>
-        </p:spPr>
-        <p:txBody>
-          <a:bodyPr wrap="square" anchor="t" lIns="0" rIns="0" tIns="0" bIns="0">
-            <a:spAutoFit/>
-          </a:bodyPr>
-          <a:lstStyle/>
-          <a:p>
-            <a:pPr algn="l"/>
-            <a:r>
-              <a:rPr sz="1000" b="1" i="0">
-                <a:solidFill>
-                  <a:srgbClr val="8F989D"/>
-                </a:solidFill>
-                <a:latin typeface="Calibri"/>
-              </a:rPr>
-              <a:t>Inicio 5:10 pm</a:t>
-            </a:r>
-          </a:p>
-        </p:txBody>
-      </p:sp>
-      <p:sp>
-        <p:nvSpPr>
-          <p:cNvPr id="9" name="TextBox 8"/>
-          <p:cNvSpPr txBox="1"/>
-          <p:nvPr/>
-        </p:nvSpPr>
-        <p:spPr>
-          <a:xfrm>
             <a:off x="11094415" y="6446520"/>
             <a:ext cx="548640" cy="274320"/>
           </a:xfrm>
@@ -6954,41 +6709,6 @@
         </p:nvSpPr>
         <p:spPr>
           <a:xfrm>
-            <a:off x="2194560" y="6446520"/>
-            <a:ext cx="5943600" cy="274320"/>
-          </a:xfrm>
-          <a:prstGeom prst="rect">
-            <a:avLst/>
-          </a:prstGeom>
-          <a:noFill/>
-        </p:spPr>
-        <p:txBody>
-          <a:bodyPr wrap="square" anchor="t" lIns="0" rIns="0" tIns="0" bIns="0">
-            <a:spAutoFit/>
-          </a:bodyPr>
-          <a:lstStyle/>
-          <a:p>
-            <a:pPr algn="l"/>
-            <a:r>
-              <a:rPr sz="1000" b="1" i="0">
-                <a:solidFill>
-                  <a:srgbClr val="8F989D"/>
-                </a:solidFill>
-                <a:latin typeface="Calibri"/>
-              </a:rPr>
-              <a:t>Inicio 5:10 pm</a:t>
-            </a:r>
-          </a:p>
-        </p:txBody>
-      </p:sp>
-      <p:sp>
-        <p:nvSpPr>
-          <p:cNvPr id="6" name="TextBox 5"/>
-          <p:cNvSpPr txBox="1"/>
-          <p:nvPr/>
-        </p:nvSpPr>
-        <p:spPr>
-          <a:xfrm>
             <a:off x="11094415" y="6446520"/>
             <a:ext cx="548640" cy="274320"/>
           </a:xfrm>
@@ -7204,41 +6924,6 @@
         </p:nvSpPr>
         <p:spPr>
           <a:xfrm>
-            <a:off x="2194560" y="6446520"/>
-            <a:ext cx="5943600" cy="274320"/>
-          </a:xfrm>
-          <a:prstGeom prst="rect">
-            <a:avLst/>
-          </a:prstGeom>
-          <a:noFill/>
-        </p:spPr>
-        <p:txBody>
-          <a:bodyPr wrap="square" anchor="t" lIns="0" rIns="0" tIns="0" bIns="0">
-            <a:spAutoFit/>
-          </a:bodyPr>
-          <a:lstStyle/>
-          <a:p>
-            <a:pPr algn="l"/>
-            <a:r>
-              <a:rPr sz="1000" b="1" i="0">
-                <a:solidFill>
-                  <a:srgbClr val="8F989D"/>
-                </a:solidFill>
-                <a:latin typeface="Calibri"/>
-              </a:rPr>
-              <a:t>Inicio 5:10 pm</a:t>
-            </a:r>
-          </a:p>
-        </p:txBody>
-      </p:sp>
-      <p:sp>
-        <p:nvSpPr>
-          <p:cNvPr id="6" name="TextBox 5"/>
-          <p:cNvSpPr txBox="1"/>
-          <p:nvPr/>
-        </p:nvSpPr>
-        <p:spPr>
-          <a:xfrm>
             <a:off x="11094415" y="6446520"/>
             <a:ext cx="548640" cy="274320"/>
           </a:xfrm>
@@ -7687,41 +7372,6 @@
         </p:nvSpPr>
         <p:spPr>
           <a:xfrm>
-            <a:off x="2194560" y="6446520"/>
-            <a:ext cx="5943600" cy="274320"/>
-          </a:xfrm>
-          <a:prstGeom prst="rect">
-            <a:avLst/>
-          </a:prstGeom>
-          <a:noFill/>
-        </p:spPr>
-        <p:txBody>
-          <a:bodyPr wrap="square" anchor="t" lIns="0" rIns="0" tIns="0" bIns="0">
-            <a:spAutoFit/>
-          </a:bodyPr>
-          <a:lstStyle/>
-          <a:p>
-            <a:pPr algn="l"/>
-            <a:r>
-              <a:rPr sz="1000" b="1" i="0">
-                <a:solidFill>
-                  <a:srgbClr val="8F989D"/>
-                </a:solidFill>
-                <a:latin typeface="Calibri"/>
-              </a:rPr>
-              <a:t>Inicio 5:10 pm</a:t>
-            </a:r>
-          </a:p>
-        </p:txBody>
-      </p:sp>
-      <p:sp>
-        <p:nvSpPr>
-          <p:cNvPr id="6" name="TextBox 5"/>
-          <p:cNvSpPr txBox="1"/>
-          <p:nvPr/>
-        </p:nvSpPr>
-        <p:spPr>
-          <a:xfrm>
             <a:off x="11094415" y="6446520"/>
             <a:ext cx="548640" cy="274320"/>
           </a:xfrm>
@@ -7994,8 +7644,8 @@
         </p:nvSpPr>
         <p:spPr>
           <a:xfrm>
-            <a:off x="2194560" y="6446520"/>
-            <a:ext cx="5943600" cy="274320"/>
+            <a:off x="11094415" y="6446520"/>
+            <a:ext cx="548640" cy="274320"/>
           </a:xfrm>
           <a:prstGeom prst="rect">
             <a:avLst/>
@@ -8008,7 +7658,7 @@
           </a:bodyPr>
           <a:lstStyle/>
           <a:p>
-            <a:pPr algn="l"/>
+            <a:pPr algn="r"/>
             <a:r>
               <a:rPr sz="1000" b="1" i="0">
                 <a:solidFill>
@@ -8016,7 +7666,7 @@
                 </a:solidFill>
                 <a:latin typeface="Calibri"/>
               </a:rPr>
-              <a:t>Inicio 5:10 pm</a:t>
+              <a:t>19</a:t>
             </a:r>
           </a:p>
         </p:txBody>
@@ -8024,41 +7674,6 @@
       <p:sp>
         <p:nvSpPr>
           <p:cNvPr id="6" name="TextBox 5"/>
-          <p:cNvSpPr txBox="1"/>
-          <p:nvPr/>
-        </p:nvSpPr>
-        <p:spPr>
-          <a:xfrm>
-            <a:off x="11094415" y="6446520"/>
-            <a:ext cx="548640" cy="274320"/>
-          </a:xfrm>
-          <a:prstGeom prst="rect">
-            <a:avLst/>
-          </a:prstGeom>
-          <a:noFill/>
-        </p:spPr>
-        <p:txBody>
-          <a:bodyPr wrap="square" anchor="t" lIns="0" rIns="0" tIns="0" bIns="0">
-            <a:spAutoFit/>
-          </a:bodyPr>
-          <a:lstStyle/>
-          <a:p>
-            <a:pPr algn="r"/>
-            <a:r>
-              <a:rPr sz="1000" b="1" i="0">
-                <a:solidFill>
-                  <a:srgbClr val="8F989D"/>
-                </a:solidFill>
-                <a:latin typeface="Calibri"/>
-              </a:rPr>
-              <a:t>19</a:t>
-            </a:r>
-          </a:p>
-        </p:txBody>
-      </p:sp>
-      <p:sp>
-        <p:nvSpPr>
-          <p:cNvPr id="7" name="TextBox 6"/>
           <p:cNvSpPr txBox="1"/>
           <p:nvPr/>
         </p:nvSpPr>
@@ -8428,8 +8043,8 @@
         </p:nvSpPr>
         <p:spPr>
           <a:xfrm>
-            <a:off x="2194560" y="6446520"/>
-            <a:ext cx="5943600" cy="274320"/>
+            <a:off x="11094415" y="6446520"/>
+            <a:ext cx="548640" cy="274320"/>
           </a:xfrm>
           <a:prstGeom prst="rect">
             <a:avLst/>
@@ -8442,7 +8057,7 @@
           </a:bodyPr>
           <a:lstStyle/>
           <a:p>
-            <a:pPr algn="l"/>
+            <a:pPr algn="r"/>
             <a:r>
               <a:rPr sz="1000" b="1" i="0">
                 <a:solidFill>
@@ -8450,7 +8065,7 @@
                 </a:solidFill>
                 <a:latin typeface="Calibri"/>
               </a:rPr>
-              <a:t>Inicio 5:10 pm</a:t>
+              <a:t>2</a:t>
             </a:r>
           </a:p>
         </p:txBody>
@@ -8458,41 +8073,6 @@
       <p:sp>
         <p:nvSpPr>
           <p:cNvPr id="6" name="TextBox 5"/>
-          <p:cNvSpPr txBox="1"/>
-          <p:nvPr/>
-        </p:nvSpPr>
-        <p:spPr>
-          <a:xfrm>
-            <a:off x="11094415" y="6446520"/>
-            <a:ext cx="548640" cy="274320"/>
-          </a:xfrm>
-          <a:prstGeom prst="rect">
-            <a:avLst/>
-          </a:prstGeom>
-          <a:noFill/>
-        </p:spPr>
-        <p:txBody>
-          <a:bodyPr wrap="square" anchor="t" lIns="0" rIns="0" tIns="0" bIns="0">
-            <a:spAutoFit/>
-          </a:bodyPr>
-          <a:lstStyle/>
-          <a:p>
-            <a:pPr algn="r"/>
-            <a:r>
-              <a:rPr sz="1000" b="1" i="0">
-                <a:solidFill>
-                  <a:srgbClr val="8F989D"/>
-                </a:solidFill>
-                <a:latin typeface="Calibri"/>
-              </a:rPr>
-              <a:t>2</a:t>
-            </a:r>
-          </a:p>
-        </p:txBody>
-      </p:sp>
-      <p:sp>
-        <p:nvSpPr>
-          <p:cNvPr id="7" name="TextBox 6"/>
           <p:cNvSpPr txBox="1"/>
           <p:nvPr/>
         </p:nvSpPr>
@@ -8946,41 +8526,6 @@
         </p:nvSpPr>
         <p:spPr>
           <a:xfrm>
-            <a:off x="2194560" y="6446520"/>
-            <a:ext cx="5943600" cy="274320"/>
-          </a:xfrm>
-          <a:prstGeom prst="rect">
-            <a:avLst/>
-          </a:prstGeom>
-          <a:noFill/>
-        </p:spPr>
-        <p:txBody>
-          <a:bodyPr wrap="square" anchor="t" lIns="0" rIns="0" tIns="0" bIns="0">
-            <a:spAutoFit/>
-          </a:bodyPr>
-          <a:lstStyle/>
-          <a:p>
-            <a:pPr algn="l"/>
-            <a:r>
-              <a:rPr sz="1000" b="1" i="0">
-                <a:solidFill>
-                  <a:srgbClr val="8F989D"/>
-                </a:solidFill>
-                <a:latin typeface="Calibri"/>
-              </a:rPr>
-              <a:t>Inicio 5:10 pm</a:t>
-            </a:r>
-          </a:p>
-        </p:txBody>
-      </p:sp>
-      <p:sp>
-        <p:nvSpPr>
-          <p:cNvPr id="11" name="TextBox 10"/>
-          <p:cNvSpPr txBox="1"/>
-          <p:nvPr/>
-        </p:nvSpPr>
-        <p:spPr>
-          <a:xfrm>
             <a:off x="11094415" y="6446520"/>
             <a:ext cx="548640" cy="274320"/>
           </a:xfrm>
@@ -9327,41 +8872,6 @@
         </p:nvSpPr>
         <p:spPr>
           <a:xfrm>
-            <a:off x="2194560" y="6446520"/>
-            <a:ext cx="5943600" cy="274320"/>
-          </a:xfrm>
-          <a:prstGeom prst="rect">
-            <a:avLst/>
-          </a:prstGeom>
-          <a:noFill/>
-        </p:spPr>
-        <p:txBody>
-          <a:bodyPr wrap="square" anchor="t" lIns="0" rIns="0" tIns="0" bIns="0">
-            <a:spAutoFit/>
-          </a:bodyPr>
-          <a:lstStyle/>
-          <a:p>
-            <a:pPr algn="l"/>
-            <a:r>
-              <a:rPr sz="1000" b="1" i="0">
-                <a:solidFill>
-                  <a:srgbClr val="8F989D"/>
-                </a:solidFill>
-                <a:latin typeface="Calibri"/>
-              </a:rPr>
-              <a:t>Inicio 5:10 pm</a:t>
-            </a:r>
-          </a:p>
-        </p:txBody>
-      </p:sp>
-      <p:sp>
-        <p:nvSpPr>
-          <p:cNvPr id="9" name="TextBox 8"/>
-          <p:cNvSpPr txBox="1"/>
-          <p:nvPr/>
-        </p:nvSpPr>
-        <p:spPr>
-          <a:xfrm>
             <a:off x="11094415" y="6446520"/>
             <a:ext cx="548640" cy="274320"/>
           </a:xfrm>
@@ -9858,41 +9368,6 @@
         </p:nvSpPr>
         <p:spPr>
           <a:xfrm>
-            <a:off x="2194560" y="6446520"/>
-            <a:ext cx="5943600" cy="274320"/>
-          </a:xfrm>
-          <a:prstGeom prst="rect">
-            <a:avLst/>
-          </a:prstGeom>
-          <a:noFill/>
-        </p:spPr>
-        <p:txBody>
-          <a:bodyPr wrap="square" anchor="t" lIns="0" rIns="0" tIns="0" bIns="0">
-            <a:spAutoFit/>
-          </a:bodyPr>
-          <a:lstStyle/>
-          <a:p>
-            <a:pPr algn="l"/>
-            <a:r>
-              <a:rPr sz="1000" b="1" i="0">
-                <a:solidFill>
-                  <a:srgbClr val="8F989D"/>
-                </a:solidFill>
-                <a:latin typeface="Calibri"/>
-              </a:rPr>
-              <a:t>Inicio 5:10 pm</a:t>
-            </a:r>
-          </a:p>
-        </p:txBody>
-      </p:sp>
-      <p:sp>
-        <p:nvSpPr>
-          <p:cNvPr id="6" name="TextBox 5"/>
-          <p:cNvSpPr txBox="1"/>
-          <p:nvPr/>
-        </p:nvSpPr>
-        <p:spPr>
-          <a:xfrm>
             <a:off x="11094415" y="6446520"/>
             <a:ext cx="548640" cy="274320"/>
           </a:xfrm>
@@ -10135,41 +9610,6 @@
                 <a:latin typeface="Calibri"/>
               </a:rPr>
               <a:t>TRABAJO DE GRADO 3</a:t>
-            </a:r>
-          </a:p>
-        </p:txBody>
-      </p:sp>
-      <p:sp>
-        <p:nvSpPr>
-          <p:cNvPr id="7" name="TextBox 6"/>
-          <p:cNvSpPr txBox="1"/>
-          <p:nvPr/>
-        </p:nvSpPr>
-        <p:spPr>
-          <a:xfrm>
-            <a:off x="2194560" y="6446520"/>
-            <a:ext cx="5943600" cy="274320"/>
-          </a:xfrm>
-          <a:prstGeom prst="rect">
-            <a:avLst/>
-          </a:prstGeom>
-          <a:noFill/>
-        </p:spPr>
-        <p:txBody>
-          <a:bodyPr wrap="square" anchor="t" lIns="0" rIns="0" tIns="0" bIns="0">
-            <a:spAutoFit/>
-          </a:bodyPr>
-          <a:lstStyle/>
-          <a:p>
-            <a:pPr algn="l"/>
-            <a:r>
-              <a:rPr sz="1000" b="1" i="0">
-                <a:solidFill>
-                  <a:srgbClr val="8F989D"/>
-                </a:solidFill>
-                <a:latin typeface="Calibri"/>
-              </a:rPr>
-              <a:t>Inicio 5:10 pm</a:t>
             </a:r>
           </a:p>
         </p:txBody>
@@ -10836,41 +10276,6 @@
         </p:nvSpPr>
         <p:spPr>
           <a:xfrm>
-            <a:off x="2194560" y="6446520"/>
-            <a:ext cx="5943600" cy="274320"/>
-          </a:xfrm>
-          <a:prstGeom prst="rect">
-            <a:avLst/>
-          </a:prstGeom>
-          <a:noFill/>
-        </p:spPr>
-        <p:txBody>
-          <a:bodyPr wrap="square" anchor="t" lIns="0" rIns="0" tIns="0" bIns="0">
-            <a:spAutoFit/>
-          </a:bodyPr>
-          <a:lstStyle/>
-          <a:p>
-            <a:pPr algn="l"/>
-            <a:r>
-              <a:rPr sz="1000" b="1" i="0">
-                <a:solidFill>
-                  <a:srgbClr val="8F989D"/>
-                </a:solidFill>
-                <a:latin typeface="Calibri"/>
-              </a:rPr>
-              <a:t>Inicio 5:10 pm</a:t>
-            </a:r>
-          </a:p>
-        </p:txBody>
-      </p:sp>
-      <p:sp>
-        <p:nvSpPr>
-          <p:cNvPr id="7" name="TextBox 6"/>
-          <p:cNvSpPr txBox="1"/>
-          <p:nvPr/>
-        </p:nvSpPr>
-        <p:spPr>
-          <a:xfrm>
             <a:off x="11094415" y="6446520"/>
             <a:ext cx="548640" cy="274320"/>
           </a:xfrm>
@@ -11317,41 +10722,6 @@
       <p:sp>
         <p:nvSpPr>
           <p:cNvPr id="5" name="TextBox 4"/>
-          <p:cNvSpPr txBox="1"/>
-          <p:nvPr/>
-        </p:nvSpPr>
-        <p:spPr>
-          <a:xfrm>
-            <a:off x="2194560" y="6446520"/>
-            <a:ext cx="5943600" cy="274320"/>
-          </a:xfrm>
-          <a:prstGeom prst="rect">
-            <a:avLst/>
-          </a:prstGeom>
-          <a:noFill/>
-        </p:spPr>
-        <p:txBody>
-          <a:bodyPr wrap="square" anchor="t" lIns="0" rIns="0" tIns="0" bIns="0">
-            <a:spAutoFit/>
-          </a:bodyPr>
-          <a:lstStyle/>
-          <a:p>
-            <a:pPr algn="l"/>
-            <a:r>
-              <a:rPr sz="1000" b="1" i="0">
-                <a:solidFill>
-                  <a:srgbClr val="8F989D"/>
-                </a:solidFill>
-                <a:latin typeface="Calibri"/>
-              </a:rPr>
-              <a:t>Inicio 5:10 pm</a:t>
-            </a:r>
-          </a:p>
-        </p:txBody>
-      </p:sp>
-      <p:sp>
-        <p:nvSpPr>
-          <p:cNvPr id="6" name="TextBox 5"/>
           <p:cNvSpPr txBox="1"/>
           <p:nvPr/>
         </p:nvSpPr>
@@ -11948,41 +11318,6 @@
       <p:sp>
         <p:nvSpPr>
           <p:cNvPr id="6" name="TextBox 5"/>
-          <p:cNvSpPr txBox="1"/>
-          <p:nvPr/>
-        </p:nvSpPr>
-        <p:spPr>
-          <a:xfrm>
-            <a:off x="2194560" y="6446520"/>
-            <a:ext cx="5943600" cy="274320"/>
-          </a:xfrm>
-          <a:prstGeom prst="rect">
-            <a:avLst/>
-          </a:prstGeom>
-          <a:noFill/>
-        </p:spPr>
-        <p:txBody>
-          <a:bodyPr wrap="square" anchor="t" lIns="0" rIns="0" tIns="0" bIns="0">
-            <a:spAutoFit/>
-          </a:bodyPr>
-          <a:lstStyle/>
-          <a:p>
-            <a:pPr algn="l"/>
-            <a:r>
-              <a:rPr sz="1000" b="1" i="0">
-                <a:solidFill>
-                  <a:srgbClr val="8F989D"/>
-                </a:solidFill>
-                <a:latin typeface="Calibri"/>
-              </a:rPr>
-              <a:t>Inicio 5:10 pm</a:t>
-            </a:r>
-          </a:p>
-        </p:txBody>
-      </p:sp>
-      <p:sp>
-        <p:nvSpPr>
-          <p:cNvPr id="7" name="TextBox 6"/>
           <p:cNvSpPr txBox="1"/>
           <p:nvPr/>
         </p:nvSpPr>
@@ -12793,41 +12128,6 @@
         </p:nvSpPr>
         <p:spPr>
           <a:xfrm>
-            <a:off x="2194560" y="6446520"/>
-            <a:ext cx="5943600" cy="274320"/>
-          </a:xfrm>
-          <a:prstGeom prst="rect">
-            <a:avLst/>
-          </a:prstGeom>
-          <a:noFill/>
-        </p:spPr>
-        <p:txBody>
-          <a:bodyPr wrap="square" anchor="t" lIns="0" rIns="0" tIns="0" bIns="0">
-            <a:spAutoFit/>
-          </a:bodyPr>
-          <a:lstStyle/>
-          <a:p>
-            <a:pPr algn="l"/>
-            <a:r>
-              <a:rPr sz="1000" b="1" i="0">
-                <a:solidFill>
-                  <a:srgbClr val="8F989D"/>
-                </a:solidFill>
-                <a:latin typeface="Calibri"/>
-              </a:rPr>
-              <a:t>Inicio 5:10 pm</a:t>
-            </a:r>
-          </a:p>
-        </p:txBody>
-      </p:sp>
-      <p:sp>
-        <p:nvSpPr>
-          <p:cNvPr id="7" name="TextBox 6"/>
-          <p:cNvSpPr txBox="1"/>
-          <p:nvPr/>
-        </p:nvSpPr>
-        <p:spPr>
-          <a:xfrm>
             <a:off x="11094415" y="6446520"/>
             <a:ext cx="548640" cy="274320"/>
           </a:xfrm>
@@ -13279,41 +12579,6 @@
         </p:nvSpPr>
         <p:spPr>
           <a:xfrm>
-            <a:off x="2194560" y="6446520"/>
-            <a:ext cx="5943600" cy="274320"/>
-          </a:xfrm>
-          <a:prstGeom prst="rect">
-            <a:avLst/>
-          </a:prstGeom>
-          <a:noFill/>
-        </p:spPr>
-        <p:txBody>
-          <a:bodyPr wrap="square" anchor="t" lIns="0" rIns="0" tIns="0" bIns="0">
-            <a:spAutoFit/>
-          </a:bodyPr>
-          <a:lstStyle/>
-          <a:p>
-            <a:pPr algn="l"/>
-            <a:r>
-              <a:rPr sz="1000" b="1" i="0">
-                <a:solidFill>
-                  <a:srgbClr val="8F989D"/>
-                </a:solidFill>
-                <a:latin typeface="Calibri"/>
-              </a:rPr>
-              <a:t>Inicio 5:10 pm</a:t>
-            </a:r>
-          </a:p>
-        </p:txBody>
-      </p:sp>
-      <p:sp>
-        <p:nvSpPr>
-          <p:cNvPr id="6" name="TextBox 5"/>
-          <p:cNvSpPr txBox="1"/>
-          <p:nvPr/>
-        </p:nvSpPr>
-        <p:spPr>
-          <a:xfrm>
             <a:off x="11094415" y="6446520"/>
             <a:ext cx="548640" cy="274320"/>
           </a:xfrm>
@@ -13765,41 +13030,6 @@
         </p:nvSpPr>
         <p:spPr>
           <a:xfrm>
-            <a:off x="2194560" y="6446520"/>
-            <a:ext cx="5943600" cy="274320"/>
-          </a:xfrm>
-          <a:prstGeom prst="rect">
-            <a:avLst/>
-          </a:prstGeom>
-          <a:noFill/>
-        </p:spPr>
-        <p:txBody>
-          <a:bodyPr wrap="square" anchor="t" lIns="0" rIns="0" tIns="0" bIns="0">
-            <a:spAutoFit/>
-          </a:bodyPr>
-          <a:lstStyle/>
-          <a:p>
-            <a:pPr algn="l"/>
-            <a:r>
-              <a:rPr sz="1000" b="1" i="0">
-                <a:solidFill>
-                  <a:srgbClr val="8F989D"/>
-                </a:solidFill>
-                <a:latin typeface="Calibri"/>
-              </a:rPr>
-              <a:t>Inicio 5:10 pm</a:t>
-            </a:r>
-          </a:p>
-        </p:txBody>
-      </p:sp>
-      <p:sp>
-        <p:nvSpPr>
-          <p:cNvPr id="6" name="TextBox 5"/>
-          <p:cNvSpPr txBox="1"/>
-          <p:nvPr/>
-        </p:nvSpPr>
-        <p:spPr>
-          <a:xfrm>
             <a:off x="11094415" y="6446520"/>
             <a:ext cx="548640" cy="274320"/>
           </a:xfrm>
@@ -13992,41 +13222,6 @@
       <p:sp>
         <p:nvSpPr>
           <p:cNvPr id="5" name="TextBox 4"/>
-          <p:cNvSpPr txBox="1"/>
-          <p:nvPr/>
-        </p:nvSpPr>
-        <p:spPr>
-          <a:xfrm>
-            <a:off x="2194560" y="6446520"/>
-            <a:ext cx="5943600" cy="274320"/>
-          </a:xfrm>
-          <a:prstGeom prst="rect">
-            <a:avLst/>
-          </a:prstGeom>
-          <a:noFill/>
-        </p:spPr>
-        <p:txBody>
-          <a:bodyPr wrap="square" anchor="t" lIns="0" rIns="0" tIns="0" bIns="0">
-            <a:spAutoFit/>
-          </a:bodyPr>
-          <a:lstStyle/>
-          <a:p>
-            <a:pPr algn="l"/>
-            <a:r>
-              <a:rPr sz="1000" b="1" i="0">
-                <a:solidFill>
-                  <a:srgbClr val="8F989D"/>
-                </a:solidFill>
-                <a:latin typeface="Calibri"/>
-              </a:rPr>
-              <a:t>Inicio 5:10 pm</a:t>
-            </a:r>
-          </a:p>
-        </p:txBody>
-      </p:sp>
-      <p:sp>
-        <p:nvSpPr>
-          <p:cNvPr id="6" name="TextBox 5"/>
           <p:cNvSpPr txBox="1"/>
           <p:nvPr/>
         </p:nvSpPr>

--- a/Pregrado/Trabajo de grado 3/Clases/Sesion 05 - Diseño de instrumento · desarrollo metodológico/Presentacion.pptx
+++ b/Pregrado/Trabajo de grado 3/Clases/Sesion 05 - Diseño de instrumento · desarrollo metodológico/Presentacion.pptx
@@ -28,6 +28,7 @@
     <p:sldId id="276" r:id="rId27"/>
     <p:sldId id="277" r:id="rId28"/>
     <p:sldId id="278" r:id="rId29"/>
+    <p:sldId id="279" r:id="rId30"/>
   </p:sldIdLst>
   <p:sldSz cx="12191695" cy="6858000" type="screen4x3"/>
   <p:notesSz cx="6858000" cy="9144000"/>
@@ -4857,7 +4858,7 @@
                 </a:solidFill>
                 <a:latin typeface="Calibri"/>
               </a:rPr>
-              <a:t> Nada de nombres, cédulas, correos ni cargos identificables en el artículo. Use códigos: Participante 1, Participante 2.</a:t>
+              <a:t> Nada de nombres, cédulas, correos ni cargos identificables en el documento. Use códigos: Participante 1, Participante 2.</a:t>
             </a:r>
           </a:p>
         </p:txBody>
@@ -7051,7 +7052,7 @@
                 </a:solidFill>
                 <a:latin typeface="Calibri"/>
               </a:rPr>
-              <a:t>TALLER — Matriz de consistencia y bosquejo del instrumento</a:t>
+              <a:t>TALLER · Matriz de consistencia y bosquejo del instrumento</a:t>
             </a:r>
           </a:p>
         </p:txBody>
@@ -7064,8 +7065,8 @@
         </p:nvSpPr>
         <p:spPr>
           <a:xfrm>
-            <a:off x="640080" y="1691639"/>
-            <a:ext cx="10911535" cy="4617720"/>
+            <a:off x="640080" y="1280160"/>
+            <a:ext cx="10911535" cy="411480"/>
           </a:xfrm>
           <a:prstGeom prst="rect">
             <a:avLst/>
@@ -7078,6 +7079,41 @@
           </a:bodyPr>
           <a:lstStyle/>
           <a:p>
+            <a:pPr algn="ctr"/>
+            <a:r>
+              <a:rPr sz="1500" b="0" i="0">
+                <a:solidFill>
+                  <a:srgbClr val="2B2B2B"/>
+                </a:solidFill>
+                <a:latin typeface="Calibri"/>
+              </a:rPr>
+              <a:t>Individual · el Docente revisa fila por fila: «¿ese instrumento sí mide esa variable?»</a:t>
+            </a:r>
+          </a:p>
+        </p:txBody>
+      </p:sp>
+      <p:sp>
+        <p:nvSpPr>
+          <p:cNvPr id="5" name="TextBox 4"/>
+          <p:cNvSpPr txBox="1"/>
+          <p:nvPr/>
+        </p:nvSpPr>
+        <p:spPr>
+          <a:xfrm>
+            <a:off x="640080" y="2011679"/>
+            <a:ext cx="10911535" cy="4297680"/>
+          </a:xfrm>
+          <a:prstGeom prst="rect">
+            <a:avLst/>
+          </a:prstGeom>
+          <a:noFill/>
+        </p:spPr>
+        <p:txBody>
+          <a:bodyPr wrap="square" anchor="t" lIns="0" rIns="0" tIns="0" bIns="0">
+            <a:spAutoFit/>
+          </a:bodyPr>
+          <a:lstStyle/>
+          <a:p>
             <a:pPr>
               <a:spcAft>
                 <a:spcPts val="1000"/>
@@ -7099,7 +7135,7 @@
                 </a:solidFill>
                 <a:latin typeface="Calibri"/>
               </a:rPr>
-              <a:t>Tiempo: 20 minutos.</a:t>
+              <a:t>Al final tiene:</a:t>
             </a:r>
             <a:r>
               <a:rPr sz="1600" b="0" i="0">
@@ -7108,7 +7144,7 @@
                 </a:solidFill>
                 <a:latin typeface="Calibri"/>
               </a:rPr>
-              <a:t> Trabajo individual. Entregable: `S05_MetodoInstrumento_Apellido`.</a:t>
+              <a:t> la matriz de consistencia completa, enfoque/alcance/diseño y el instrumento bosquejado.</a:t>
             </a:r>
           </a:p>
           <a:p>
@@ -7133,240 +7169,267 @@
                 </a:solidFill>
                 <a:latin typeface="Calibri"/>
               </a:rPr>
-              <a:t>Consigna literal:</a:t>
-            </a:r>
-          </a:p>
-          <a:p>
-            <a:pPr lvl="1">
+              <a:t>Paso 1</a:t>
+            </a:r>
+            <a:r>
+              <a:rPr sz="1600" b="0" i="0">
+                <a:solidFill>
+                  <a:srgbClr val="2B2B2B"/>
+                </a:solidFill>
+                <a:latin typeface="Calibri"/>
+              </a:rPr>
+              <a:t> · Llene su </a:t>
+            </a:r>
+            <a:r>
+              <a:rPr sz="1600" b="1" i="0">
+                <a:solidFill>
+                  <a:srgbClr val="2B2B2B"/>
+                </a:solidFill>
+                <a:latin typeface="Calibri"/>
+              </a:rPr>
+              <a:t>matriz de consistencia</a:t>
+            </a:r>
+            <a:r>
+              <a:rPr sz="1600" b="0" i="0">
+                <a:solidFill>
+                  <a:srgbClr val="2B2B2B"/>
+                </a:solidFill>
+                <a:latin typeface="Calibri"/>
+              </a:rPr>
+              <a:t> con </a:t>
+            </a:r>
+            <a:r>
+              <a:rPr sz="1600" b="1" i="0">
+                <a:solidFill>
+                  <a:srgbClr val="2B2B2B"/>
+                </a:solidFill>
+                <a:latin typeface="Calibri"/>
+              </a:rPr>
+              <a:t>una fila por objetivo específico</a:t>
+            </a:r>
+            <a:r>
+              <a:rPr sz="1600" b="0" i="0">
+                <a:solidFill>
+                  <a:srgbClr val="2B2B2B"/>
+                </a:solidFill>
+                <a:latin typeface="Calibri"/>
+              </a:rPr>
+              <a:t> y las cinco columnas completas.</a:t>
+            </a:r>
+          </a:p>
+          <a:p>
+            <a:pPr>
               <a:spcAft>
-                <a:spcPts val="600"/>
+                <a:spcPts val="1000"/>
               </a:spcAft>
             </a:pPr>
             <a:r>
-              <a:rPr sz="1500" b="0" i="0">
-                <a:solidFill>
-                  <a:srgbClr val="2B2B2B"/>
-                </a:solidFill>
-                <a:latin typeface="Calibri"/>
-              </a:rPr>
-              <a:t>●   </a:t>
-            </a:r>
-            <a:r>
-              <a:rPr sz="1500" b="1" i="0">
-                <a:solidFill>
-                  <a:srgbClr val="2B2B2B"/>
-                </a:solidFill>
-                <a:latin typeface="Calibri"/>
-              </a:rPr>
-              <a:t>(1)</a:t>
-            </a:r>
-            <a:r>
-              <a:rPr sz="1500" b="0" i="0">
-                <a:solidFill>
-                  <a:srgbClr val="2B2B2B"/>
-                </a:solidFill>
-                <a:latin typeface="Calibri"/>
-              </a:rPr>
-              <a:t> Llene su </a:t>
-            </a:r>
-            <a:r>
-              <a:rPr sz="1500" b="1" i="0">
-                <a:solidFill>
-                  <a:srgbClr val="2B2B2B"/>
-                </a:solidFill>
-                <a:latin typeface="Calibri"/>
-              </a:rPr>
-              <a:t>matriz de consistencia</a:t>
-            </a:r>
-            <a:r>
-              <a:rPr sz="1500" b="0" i="0">
-                <a:solidFill>
-                  <a:srgbClr val="2B2B2B"/>
-                </a:solidFill>
-                <a:latin typeface="Calibri"/>
-              </a:rPr>
-              <a:t> con </a:t>
-            </a:r>
-            <a:r>
-              <a:rPr sz="1500" b="1" i="0">
-                <a:solidFill>
-                  <a:srgbClr val="2B2B2B"/>
-                </a:solidFill>
-                <a:latin typeface="Calibri"/>
-              </a:rPr>
-              <a:t>una fila por objetivo específico</a:t>
-            </a:r>
-            <a:r>
-              <a:rPr sz="1500" b="0" i="0">
-                <a:solidFill>
-                  <a:srgbClr val="2B2B2B"/>
-                </a:solidFill>
-                <a:latin typeface="Calibri"/>
-              </a:rPr>
-              <a:t> y las cinco columnas completas.</a:t>
-            </a:r>
-          </a:p>
-          <a:p>
-            <a:pPr lvl="1">
+              <a:rPr sz="1600" b="0" i="0">
+                <a:solidFill>
+                  <a:srgbClr val="2B2B2B"/>
+                </a:solidFill>
+                <a:latin typeface="Calibri"/>
+              </a:rPr>
+              <a:t>–   </a:t>
+            </a:r>
+            <a:r>
+              <a:rPr sz="1600" b="1" i="0">
+                <a:solidFill>
+                  <a:srgbClr val="2B2B2B"/>
+                </a:solidFill>
+                <a:latin typeface="Calibri"/>
+              </a:rPr>
+              <a:t>Paso 2</a:t>
+            </a:r>
+            <a:r>
+              <a:rPr sz="1600" b="0" i="0">
+                <a:solidFill>
+                  <a:srgbClr val="2B2B2B"/>
+                </a:solidFill>
+                <a:latin typeface="Calibri"/>
+              </a:rPr>
+              <a:t> · Declare en </a:t>
+            </a:r>
+            <a:r>
+              <a:rPr sz="1600" b="1" i="0">
+                <a:solidFill>
+                  <a:srgbClr val="2B2B2B"/>
+                </a:solidFill>
+                <a:latin typeface="Calibri"/>
+              </a:rPr>
+              <a:t>tres líneas</a:t>
+            </a:r>
+            <a:r>
+              <a:rPr sz="1600" b="0" i="0">
+                <a:solidFill>
+                  <a:srgbClr val="2B2B2B"/>
+                </a:solidFill>
+                <a:latin typeface="Calibri"/>
+              </a:rPr>
+              <a:t> su enfoque, su alcance y su diseño, cada uno con media línea de justificación.</a:t>
+            </a:r>
+          </a:p>
+          <a:p>
+            <a:pPr>
               <a:spcAft>
-                <a:spcPts val="600"/>
+                <a:spcPts val="1000"/>
               </a:spcAft>
             </a:pPr>
             <a:r>
-              <a:rPr sz="1500" b="0" i="0">
-                <a:solidFill>
-                  <a:srgbClr val="2B2B2B"/>
-                </a:solidFill>
-                <a:latin typeface="Calibri"/>
-              </a:rPr>
-              <a:t>●   </a:t>
-            </a:r>
-            <a:r>
-              <a:rPr sz="1500" b="1" i="0">
-                <a:solidFill>
-                  <a:srgbClr val="2B2B2B"/>
-                </a:solidFill>
-                <a:latin typeface="Calibri"/>
-              </a:rPr>
-              <a:t>(2)</a:t>
-            </a:r>
-            <a:r>
-              <a:rPr sz="1500" b="0" i="0">
-                <a:solidFill>
-                  <a:srgbClr val="2B2B2B"/>
-                </a:solidFill>
-                <a:latin typeface="Calibri"/>
-              </a:rPr>
-              <a:t> Declare en </a:t>
-            </a:r>
-            <a:r>
-              <a:rPr sz="1500" b="1" i="0">
-                <a:solidFill>
-                  <a:srgbClr val="2B2B2B"/>
-                </a:solidFill>
-                <a:latin typeface="Calibri"/>
-              </a:rPr>
-              <a:t>tres líneas</a:t>
-            </a:r>
-            <a:r>
-              <a:rPr sz="1500" b="0" i="0">
-                <a:solidFill>
-                  <a:srgbClr val="2B2B2B"/>
-                </a:solidFill>
-                <a:latin typeface="Calibri"/>
-              </a:rPr>
-              <a:t> su enfoque, su alcance y su diseño, cada uno con media línea de justificación.</a:t>
-            </a:r>
-          </a:p>
-          <a:p>
-            <a:pPr lvl="1">
+              <a:rPr sz="1600" b="0" i="0">
+                <a:solidFill>
+                  <a:srgbClr val="2B2B2B"/>
+                </a:solidFill>
+                <a:latin typeface="Calibri"/>
+              </a:rPr>
+              <a:t>–   </a:t>
+            </a:r>
+            <a:r>
+              <a:rPr sz="1600" b="1" i="0">
+                <a:solidFill>
+                  <a:srgbClr val="2B2B2B"/>
+                </a:solidFill>
+                <a:latin typeface="Calibri"/>
+              </a:rPr>
+              <a:t>Paso 3</a:t>
+            </a:r>
+            <a:r>
+              <a:rPr sz="1600" b="0" i="0">
+                <a:solidFill>
+                  <a:srgbClr val="2B2B2B"/>
+                </a:solidFill>
+                <a:latin typeface="Calibri"/>
+              </a:rPr>
+              <a:t> · Redacte el </a:t>
+            </a:r>
+            <a:r>
+              <a:rPr sz="1600" b="1" i="0">
+                <a:solidFill>
+                  <a:srgbClr val="2B2B2B"/>
+                </a:solidFill>
+                <a:latin typeface="Calibri"/>
+              </a:rPr>
+              <a:t>bosquejo del instrumento</a:t>
+            </a:r>
+            <a:r>
+              <a:rPr sz="1600" b="0" i="0">
+                <a:solidFill>
+                  <a:srgbClr val="2B2B2B"/>
+                </a:solidFill>
+                <a:latin typeface="Calibri"/>
+              </a:rPr>
+              <a:t>: 10 ítems de cuestionario, o una guía de 8 preguntas, o la rúbrica del prototipo con 4 a 6 criterios.</a:t>
+            </a:r>
+          </a:p>
+          <a:p>
+            <a:pPr>
               <a:spcAft>
-                <a:spcPts val="600"/>
+                <a:spcPts val="1000"/>
               </a:spcAft>
             </a:pPr>
             <a:r>
-              <a:rPr sz="1500" b="0" i="0">
-                <a:solidFill>
-                  <a:srgbClr val="2B2B2B"/>
-                </a:solidFill>
-                <a:latin typeface="Calibri"/>
-              </a:rPr>
-              <a:t>●   </a:t>
-            </a:r>
-            <a:r>
-              <a:rPr sz="1500" b="1" i="0">
-                <a:solidFill>
-                  <a:srgbClr val="2B2B2B"/>
-                </a:solidFill>
-                <a:latin typeface="Calibri"/>
-              </a:rPr>
-              <a:t>(3)</a:t>
-            </a:r>
-            <a:r>
-              <a:rPr sz="1500" b="0" i="0">
-                <a:solidFill>
-                  <a:srgbClr val="2B2B2B"/>
-                </a:solidFill>
-                <a:latin typeface="Calibri"/>
-              </a:rPr>
-              <a:t> Redacte el </a:t>
-            </a:r>
-            <a:r>
-              <a:rPr sz="1500" b="1" i="0">
-                <a:solidFill>
-                  <a:srgbClr val="2B2B2B"/>
-                </a:solidFill>
-                <a:latin typeface="Calibri"/>
-              </a:rPr>
-              <a:t>bosquejo del instrumento</a:t>
-            </a:r>
-            <a:r>
-              <a:rPr sz="1500" b="0" i="0">
-                <a:solidFill>
-                  <a:srgbClr val="2B2B2B"/>
-                </a:solidFill>
-                <a:latin typeface="Calibri"/>
-              </a:rPr>
-              <a:t>: 10 ítems de cuestionario, o una guía de 8 preguntas, o la rúbrica del prototipo con 4 a 6 criterios.</a:t>
-            </a:r>
-          </a:p>
-          <a:p>
-            <a:pPr lvl="1">
+              <a:rPr sz="1600" b="0" i="0">
+                <a:solidFill>
+                  <a:srgbClr val="2B2B2B"/>
+                </a:solidFill>
+                <a:latin typeface="Calibri"/>
+              </a:rPr>
+              <a:t>–   </a:t>
+            </a:r>
+            <a:r>
+              <a:rPr sz="1600" b="1" i="0">
+                <a:solidFill>
+                  <a:srgbClr val="2B2B2B"/>
+                </a:solidFill>
+                <a:latin typeface="Calibri"/>
+              </a:rPr>
+              <a:t>Paso 4</a:t>
+            </a:r>
+            <a:r>
+              <a:rPr sz="1600" b="0" i="0">
+                <a:solidFill>
+                  <a:srgbClr val="2B2B2B"/>
+                </a:solidFill>
+                <a:latin typeface="Calibri"/>
+              </a:rPr>
+              <a:t> · Escriba </a:t>
+            </a:r>
+            <a:r>
+              <a:rPr sz="1600" b="1" i="0">
+                <a:solidFill>
+                  <a:srgbClr val="2B2B2B"/>
+                </a:solidFill>
+                <a:latin typeface="Calibri"/>
+              </a:rPr>
+              <a:t>una línea</a:t>
+            </a:r>
+            <a:r>
+              <a:rPr sz="1600" b="0" i="0">
+                <a:solidFill>
+                  <a:srgbClr val="2B2B2B"/>
+                </a:solidFill>
+                <a:latin typeface="Calibri"/>
+              </a:rPr>
+              <a:t> sobre el tratamiento ético de los datos.</a:t>
+            </a:r>
+          </a:p>
+          <a:p>
+            <a:pPr>
               <a:spcAft>
-                <a:spcPts val="600"/>
+                <a:spcPts val="1000"/>
               </a:spcAft>
             </a:pPr>
             <a:r>
-              <a:rPr sz="1500" b="0" i="0">
-                <a:solidFill>
-                  <a:srgbClr val="2B2B2B"/>
-                </a:solidFill>
-                <a:latin typeface="Calibri"/>
-              </a:rPr>
-              <a:t>●   </a:t>
-            </a:r>
-            <a:r>
-              <a:rPr sz="1500" b="1" i="0">
-                <a:solidFill>
-                  <a:srgbClr val="2B2B2B"/>
-                </a:solidFill>
-                <a:latin typeface="Calibri"/>
-              </a:rPr>
-              <a:t>(4)</a:t>
-            </a:r>
-            <a:r>
-              <a:rPr sz="1500" b="0" i="0">
-                <a:solidFill>
-                  <a:srgbClr val="2B2B2B"/>
-                </a:solidFill>
-                <a:latin typeface="Calibri"/>
-              </a:rPr>
-              <a:t> Escriba </a:t>
-            </a:r>
-            <a:r>
-              <a:rPr sz="1500" b="1" i="0">
-                <a:solidFill>
-                  <a:srgbClr val="2B2B2B"/>
-                </a:solidFill>
-                <a:latin typeface="Calibri"/>
-              </a:rPr>
-              <a:t>una línea</a:t>
-            </a:r>
-            <a:r>
-              <a:rPr sz="1500" b="0" i="0">
-                <a:solidFill>
-                  <a:srgbClr val="2B2B2B"/>
-                </a:solidFill>
-                <a:latin typeface="Calibri"/>
-              </a:rPr>
-              <a:t> sobre el tratamiento ético de los datos.</a:t>
-            </a:r>
-          </a:p>
-        </p:txBody>
-      </p:sp>
-      <p:sp>
-        <p:nvSpPr>
-          <p:cNvPr id="5" name="TextBox 4"/>
+              <a:rPr sz="1600" b="0" i="0">
+                <a:solidFill>
+                  <a:srgbClr val="2B2B2B"/>
+                </a:solidFill>
+                <a:latin typeface="Calibri"/>
+              </a:rPr>
+              <a:t>–   </a:t>
+            </a:r>
+            <a:r>
+              <a:rPr sz="1600" b="1" i="0">
+                <a:solidFill>
+                  <a:srgbClr val="2B2B2B"/>
+                </a:solidFill>
+                <a:latin typeface="Calibri"/>
+              </a:rPr>
+              <a:t>En clase, sin falta:</a:t>
+            </a:r>
+            <a:r>
+              <a:rPr sz="1600" b="0" i="0">
+                <a:solidFill>
+                  <a:srgbClr val="2B2B2B"/>
+                </a:solidFill>
+                <a:latin typeface="Calibri"/>
+              </a:rPr>
+              <a:t> los </a:t>
+            </a:r>
+            <a:r>
+              <a:rPr sz="1600" b="1" i="0">
+                <a:solidFill>
+                  <a:srgbClr val="2B2B2B"/>
+                </a:solidFill>
+                <a:latin typeface="Calibri"/>
+              </a:rPr>
+              <a:t>pasos 1 a 2</a:t>
+            </a:r>
+            <a:r>
+              <a:rPr sz="1600" b="0" i="0">
+                <a:solidFill>
+                  <a:srgbClr val="2B2B2B"/>
+                </a:solidFill>
+                <a:latin typeface="Calibri"/>
+              </a:rPr>
+              <a:t>. Del 3 en adelante puede quedar en trabajo autónomo, pero antes de la próxima sesión.</a:t>
+            </a:r>
+          </a:p>
+        </p:txBody>
+      </p:sp>
+      <p:sp>
+        <p:nvSpPr>
+          <p:cNvPr id="6" name="TextBox 5"/>
           <p:cNvSpPr txBox="1"/>
           <p:nvPr/>
         </p:nvSpPr>
@@ -7499,7 +7562,7 @@
                 </a:solidFill>
                 <a:latin typeface="Calibri"/>
               </a:rPr>
-              <a:t>TALLER — Matriz de consistencia y bosquejo del instrumento (cont.)</a:t>
+              <a:t>TALLER · cómo se revisa y dónde se entrega</a:t>
             </a:r>
           </a:p>
         </p:txBody>
@@ -7512,8 +7575,8 @@
         </p:nvSpPr>
         <p:spPr>
           <a:xfrm>
-            <a:off x="640080" y="1691639"/>
-            <a:ext cx="10911535" cy="4617720"/>
+            <a:off x="640080" y="1280160"/>
+            <a:ext cx="10911535" cy="411480"/>
           </a:xfrm>
           <a:prstGeom prst="rect">
             <a:avLst/>
@@ -7526,6 +7589,41 @@
           </a:bodyPr>
           <a:lstStyle/>
           <a:p>
+            <a:pPr algn="ctr"/>
+            <a:r>
+              <a:rPr sz="1500" b="0" i="0">
+                <a:solidFill>
+                  <a:srgbClr val="2B2B2B"/>
+                </a:solidFill>
+                <a:latin typeface="Calibri"/>
+              </a:rPr>
+              <a:t>Matriz de consistencia y bosquejo del instrumento</a:t>
+            </a:r>
+          </a:p>
+        </p:txBody>
+      </p:sp>
+      <p:sp>
+        <p:nvSpPr>
+          <p:cNvPr id="5" name="TextBox 4"/>
+          <p:cNvSpPr txBox="1"/>
+          <p:nvPr/>
+        </p:nvSpPr>
+        <p:spPr>
+          <a:xfrm>
+            <a:off x="640080" y="2011679"/>
+            <a:ext cx="10911535" cy="4297680"/>
+          </a:xfrm>
+          <a:prstGeom prst="rect">
+            <a:avLst/>
+          </a:prstGeom>
+          <a:noFill/>
+        </p:spPr>
+        <p:txBody>
+          <a:bodyPr wrap="square" anchor="t" lIns="0" rIns="0" tIns="0" bIns="0">
+            <a:spAutoFit/>
+          </a:bodyPr>
+          <a:lstStyle/>
+          <a:p>
             <a:pPr>
               <a:spcAft>
                 <a:spcPts val="1000"/>
@@ -7547,7 +7645,16 @@
                 </a:solidFill>
                 <a:latin typeface="Calibri"/>
               </a:rPr>
-              <a:t>Criterio de éxito (así se verifica):</a:t>
+              <a:t>Quedó bien si</a:t>
+            </a:r>
+            <a:r>
+              <a:rPr sz="1600" b="0" i="0">
+                <a:solidFill>
+                  <a:srgbClr val="2B2B2B"/>
+                </a:solidFill>
+                <a:latin typeface="Calibri"/>
+              </a:rPr>
+              <a:t> —compruébelo usted antes de cerrar el documento—:</a:t>
             </a:r>
           </a:p>
           <a:p>
@@ -7631,14 +7738,224 @@
                 </a:solidFill>
                 <a:latin typeface="Calibri"/>
               </a:rPr>
-              <a:t>●   Un compañero puede leer su matriz y decirle qué va a hacer usted, sin que se lo explique.</a:t>
-            </a:r>
-          </a:p>
-        </p:txBody>
-      </p:sp>
-      <p:sp>
-        <p:nvSpPr>
-          <p:cNvPr id="5" name="TextBox 4"/>
+              <a:t>●   Un compañero puede leer su matriz y decirle </a:t>
+            </a:r>
+            <a:r>
+              <a:rPr sz="1500" b="1" i="0">
+                <a:solidFill>
+                  <a:srgbClr val="2B2B2B"/>
+                </a:solidFill>
+                <a:latin typeface="Calibri"/>
+              </a:rPr>
+              <a:t>qué va a hacer usted</a:t>
+            </a:r>
+            <a:r>
+              <a:rPr sz="1500" b="0" i="0">
+                <a:solidFill>
+                  <a:srgbClr val="2B2B2B"/>
+                </a:solidFill>
+                <a:latin typeface="Calibri"/>
+              </a:rPr>
+              <a:t>, sin que se lo explique.</a:t>
+            </a:r>
+          </a:p>
+          <a:p>
+            <a:pPr>
+              <a:spcAft>
+                <a:spcPts val="1000"/>
+              </a:spcAft>
+            </a:pPr>
+            <a:r>
+              <a:rPr sz="1600" b="0" i="0">
+                <a:solidFill>
+                  <a:srgbClr val="2B2B2B"/>
+                </a:solidFill>
+                <a:latin typeface="Calibri"/>
+              </a:rPr>
+              <a:t>–   </a:t>
+            </a:r>
+            <a:r>
+              <a:rPr sz="1600" b="1" i="0">
+                <a:solidFill>
+                  <a:srgbClr val="2B2B2B"/>
+                </a:solidFill>
+                <a:latin typeface="Calibri"/>
+              </a:rPr>
+              <a:t>Plan B:</a:t>
+            </a:r>
+            <a:r>
+              <a:rPr sz="1600" b="0" i="0">
+                <a:solidFill>
+                  <a:srgbClr val="2B2B2B"/>
+                </a:solidFill>
+                <a:latin typeface="Calibri"/>
+              </a:rPr>
+              <a:t> Si un instrumento no mide la variable de su fila, no cambie la variable: cambie el ítem. La matriz manda sobre el instrumento.</a:t>
+            </a:r>
+          </a:p>
+          <a:p>
+            <a:pPr>
+              <a:spcAft>
+                <a:spcPts val="1000"/>
+              </a:spcAft>
+            </a:pPr>
+            <a:r>
+              <a:rPr sz="1600" b="0" i="0">
+                <a:solidFill>
+                  <a:srgbClr val="2B2B2B"/>
+                </a:solidFill>
+                <a:latin typeface="Calibri"/>
+              </a:rPr>
+              <a:t>–   </a:t>
+            </a:r>
+            <a:r>
+              <a:rPr sz="1600" b="1" i="0">
+                <a:solidFill>
+                  <a:srgbClr val="2B2B2B"/>
+                </a:solidFill>
+                <a:latin typeface="Calibri"/>
+              </a:rPr>
+              <a:t>Hoy no se sube nada al aula:</a:t>
+            </a:r>
+            <a:r>
+              <a:rPr sz="1600" b="0" i="0">
+                <a:solidFill>
+                  <a:srgbClr val="2B2B2B"/>
+                </a:solidFill>
+                <a:latin typeface="Calibri"/>
+              </a:rPr>
+              <a:t> guarde `S05_MetodoInstrumento_Apellido` (Google Doc o PDF) en su Drive y tráigalo a la próxima sesión. Es un </a:t>
+            </a:r>
+            <a:r>
+              <a:rPr sz="1600" b="1" i="0">
+                <a:solidFill>
+                  <a:srgbClr val="2B2B2B"/>
+                </a:solidFill>
+                <a:latin typeface="Calibri"/>
+              </a:rPr>
+              <a:t>avance formativo</a:t>
+            </a:r>
+            <a:r>
+              <a:rPr sz="1600" b="0" i="0">
+                <a:solidFill>
+                  <a:srgbClr val="2B2B2B"/>
+                </a:solidFill>
+                <a:latin typeface="Calibri"/>
+              </a:rPr>
+              <a:t>, se revisa en clase.</a:t>
+            </a:r>
+          </a:p>
+          <a:p>
+            <a:pPr>
+              <a:spcAft>
+                <a:spcPts val="1000"/>
+              </a:spcAft>
+            </a:pPr>
+            <a:r>
+              <a:rPr sz="1600" b="0" i="0">
+                <a:solidFill>
+                  <a:srgbClr val="2B2B2B"/>
+                </a:solidFill>
+                <a:latin typeface="Calibri"/>
+              </a:rPr>
+              <a:t>–   </a:t>
+            </a:r>
+            <a:r>
+              <a:rPr sz="1600" b="1" i="0">
+                <a:solidFill>
+                  <a:srgbClr val="2B2B2B"/>
+                </a:solidFill>
+                <a:latin typeface="Calibri"/>
+              </a:rPr>
+              <a:t>Esto alimenta:</a:t>
+            </a:r>
+            <a:r>
+              <a:rPr sz="1600" b="0" i="0">
+                <a:solidFill>
+                  <a:srgbClr val="2B2B2B"/>
+                </a:solidFill>
+                <a:latin typeface="Calibri"/>
+              </a:rPr>
+              <a:t> </a:t>
+            </a:r>
+            <a:r>
+              <a:rPr sz="1600" b="1" i="0">
+                <a:solidFill>
+                  <a:srgbClr val="2B2B2B"/>
+                </a:solidFill>
+                <a:latin typeface="Calibri"/>
+              </a:rPr>
+              <a:t>ACA Final</a:t>
+            </a:r>
+            <a:r>
+              <a:rPr sz="1600" b="0" i="0">
+                <a:solidFill>
+                  <a:srgbClr val="2B2B2B"/>
+                </a:solidFill>
+                <a:latin typeface="Calibri"/>
+              </a:rPr>
+              <a:t> —tarea, 32%—, el documento que </a:t>
+            </a:r>
+            <a:r>
+              <a:rPr sz="1600" b="1" i="0">
+                <a:solidFill>
+                  <a:srgbClr val="2B2B2B"/>
+                </a:solidFill>
+                <a:latin typeface="Calibri"/>
+              </a:rPr>
+              <a:t>sí</a:t>
+            </a:r>
+            <a:r>
+              <a:rPr sz="1600" b="0" i="0">
+                <a:solidFill>
+                  <a:srgbClr val="2B2B2B"/>
+                </a:solidFill>
+                <a:latin typeface="Calibri"/>
+              </a:rPr>
+              <a:t> recibe </a:t>
+            </a:r>
+            <a:r>
+              <a:rPr sz="1600" b="1" i="0">
+                <a:solidFill>
+                  <a:srgbClr val="2B2B2B"/>
+                </a:solidFill>
+                <a:latin typeface="Calibri"/>
+              </a:rPr>
+              <a:t>el aula de su grupo</a:t>
+            </a:r>
+            <a:r>
+              <a:rPr sz="1600" b="0" i="0">
+                <a:solidFill>
+                  <a:srgbClr val="2B2B2B"/>
+                </a:solidFill>
+                <a:latin typeface="Calibri"/>
+              </a:rPr>
+              <a:t> en CDigital; cierra en la semana de la </a:t>
+            </a:r>
+            <a:r>
+              <a:rPr sz="1600" b="1" i="0">
+                <a:solidFill>
+                  <a:srgbClr val="2B2B2B"/>
+                </a:solidFill>
+                <a:latin typeface="Calibri"/>
+              </a:rPr>
+              <a:t>Sesión 13</a:t>
+            </a:r>
+            <a:r>
+              <a:rPr sz="1600" b="0" i="0">
+                <a:solidFill>
+                  <a:srgbClr val="2B2B2B"/>
+                </a:solidFill>
+                <a:latin typeface="Calibri"/>
+              </a:rPr>
+              <a:t>.</a:t>
+            </a:r>
+          </a:p>
+        </p:txBody>
+      </p:sp>
+      <p:sp>
+        <p:nvSpPr>
+          <p:cNvPr id="6" name="TextBox 5"/>
           <p:cNvSpPr txBox="1"/>
           <p:nvPr/>
         </p:nvSpPr>
@@ -7667,58 +7984,6 @@
                 <a:latin typeface="Calibri"/>
               </a:rPr>
               <a:t>19</a:t>
-            </a:r>
-          </a:p>
-        </p:txBody>
-      </p:sp>
-      <p:sp>
-        <p:nvSpPr>
-          <p:cNvPr id="6" name="TextBox 5"/>
-          <p:cNvSpPr txBox="1"/>
-          <p:nvPr/>
-        </p:nvSpPr>
-        <p:spPr>
-          <a:xfrm>
-            <a:off x="640080" y="5943600"/>
-            <a:ext cx="9997135" cy="457200"/>
-          </a:xfrm>
-          <a:prstGeom prst="rect">
-            <a:avLst/>
-          </a:prstGeom>
-          <a:noFill/>
-        </p:spPr>
-        <p:txBody>
-          <a:bodyPr wrap="square" anchor="t" lIns="0" rIns="0" tIns="0" bIns="0">
-            <a:spAutoFit/>
-          </a:bodyPr>
-          <a:lstStyle/>
-          <a:p>
-            <a:r>
-              <a:rPr sz="1200" b="0" i="1">
-                <a:solidFill>
-                  <a:srgbClr val="2B2B2B"/>
-                </a:solidFill>
-                <a:latin typeface="Calibri"/>
-              </a:rPr>
-              <a:t>Mientras trabajan, </a:t>
-            </a:r>
-            <a:r>
-              <a:rPr sz="1200" b="1" i="1">
-                <a:solidFill>
-                  <a:srgbClr val="2B2B2B"/>
-                </a:solidFill>
-                <a:latin typeface="Calibri"/>
-              </a:rPr>
-              <a:t>el Docente</a:t>
-            </a:r>
-            <a:r>
-              <a:rPr sz="1200" b="0" i="1">
-                <a:solidFill>
-                  <a:srgbClr val="2B2B2B"/>
-                </a:solidFill>
-                <a:latin typeface="Calibri"/>
-              </a:rPr>
-              <a:t> revisa fila por fila. La pregunta que va a escuchar todo el tiempo es: "¿ese instrumento sí mide esa variable?".</a:t>
             </a:r>
           </a:p>
         </p:txBody>
@@ -9074,7 +9339,25 @@
                 </a:solidFill>
                 <a:latin typeface="Calibri"/>
               </a:rPr>
-              <a:t>: [URL CDigital — campus del curso pendiente]</a:t>
+              <a:t>: el aula de </a:t>
+            </a:r>
+            <a:r>
+              <a:rPr sz="1600" b="1" i="0">
+                <a:solidFill>
+                  <a:srgbClr val="2B2B2B"/>
+                </a:solidFill>
+                <a:latin typeface="Calibri"/>
+              </a:rPr>
+              <a:t>su grupo</a:t>
+            </a:r>
+            <a:r>
+              <a:rPr sz="1600" b="0" i="0">
+                <a:solidFill>
+                  <a:srgbClr val="2B2B2B"/>
+                </a:solidFill>
+                <a:latin typeface="Calibri"/>
+              </a:rPr>
+              <a:t> en CDigital</a:t>
             </a:r>
           </a:p>
           <a:p>
@@ -9287,7 +9570,7 @@
                 </a:solidFill>
                 <a:latin typeface="Calibri"/>
               </a:rPr>
-              <a:t> del artículo con lo que produjo hoy: la matriz se traduce a prosa casi sola.</a:t>
+              <a:t> del documento con lo que produjo hoy: la matriz se traduce a prosa casi sola.</a:t>
             </a:r>
           </a:p>
           <a:p>
@@ -9404,6 +9687,1214 @@
 </file>
 
 <file path=ppt/slides/slide23.xml><?xml version="1.0" encoding="utf-8"?>
+<p:sld xmlns:a="http://schemas.openxmlformats.org/drawingml/2006/main" xmlns:p="http://schemas.openxmlformats.org/presentationml/2006/main" xmlns:r="http://schemas.openxmlformats.org/officeDocument/2006/relationships">
+  <p:cSld>
+    <p:bg>
+      <p:bgPr>
+        <a:solidFill>
+          <a:srgbClr val="FFFFFF"/>
+        </a:solidFill>
+        <a:effectLst/>
+      </p:bgPr>
+    </p:bg>
+    <p:spTree>
+      <p:nvGrpSpPr>
+        <p:cNvPr id="1" name=""/>
+        <p:cNvGrpSpPr/>
+        <p:nvPr/>
+      </p:nvGrpSpPr>
+      <p:grpSpPr/>
+      <p:sp>
+        <p:nvSpPr>
+          <p:cNvPr id="2" name="Rectangle 1"/>
+          <p:cNvSpPr/>
+          <p:nvPr/>
+        </p:nvSpPr>
+        <p:spPr>
+          <a:xfrm>
+            <a:off x="0" y="0"/>
+            <a:ext cx="12191695" cy="1188720"/>
+          </a:xfrm>
+          <a:prstGeom prst="rect">
+            <a:avLst/>
+          </a:prstGeom>
+          <a:solidFill>
+            <a:srgbClr val="0C2340"/>
+          </a:solidFill>
+          <a:ln>
+            <a:noFill/>
+          </a:ln>
+          <a:effectLst/>
+        </p:spPr>
+        <p:style>
+          <a:lnRef idx="1">
+            <a:schemeClr val="accent1"/>
+          </a:lnRef>
+          <a:fillRef idx="3">
+            <a:schemeClr val="accent1"/>
+          </a:fillRef>
+          <a:effectRef idx="2">
+            <a:schemeClr val="accent1"/>
+          </a:effectRef>
+          <a:fontRef idx="minor">
+            <a:schemeClr val="lt1"/>
+          </a:fontRef>
+        </p:style>
+        <p:txBody>
+          <a:bodyPr rtlCol="0" anchor="ctr"/>
+          <a:lstStyle/>
+          <a:p>
+            <a:pPr algn="ctr"/>
+          </a:p>
+        </p:txBody>
+      </p:sp>
+      <p:sp>
+        <p:nvSpPr>
+          <p:cNvPr id="3" name="TextBox 2"/>
+          <p:cNvSpPr txBox="1"/>
+          <p:nvPr/>
+        </p:nvSpPr>
+        <p:spPr>
+          <a:xfrm>
+            <a:off x="640080" y="0"/>
+            <a:ext cx="9082735" cy="1188720"/>
+          </a:xfrm>
+          <a:prstGeom prst="rect">
+            <a:avLst/>
+          </a:prstGeom>
+          <a:noFill/>
+        </p:spPr>
+        <p:txBody>
+          <a:bodyPr wrap="square" anchor="ctr" lIns="0" rIns="0" tIns="0" bIns="0">
+            <a:spAutoFit/>
+          </a:bodyPr>
+          <a:lstStyle/>
+          <a:p>
+            <a:pPr algn="ctr"/>
+            <a:r>
+              <a:rPr sz="2600" b="1" i="0">
+                <a:solidFill>
+                  <a:srgbClr val="FFFFFF"/>
+                </a:solidFill>
+                <a:latin typeface="Calibri"/>
+              </a:rPr>
+              <a:t>RUTA DE ENTREGABLES DEL CURSO</a:t>
+            </a:r>
+          </a:p>
+        </p:txBody>
+      </p:sp>
+      <p:sp>
+        <p:nvSpPr>
+          <p:cNvPr id="4" name="TextBox 3"/>
+          <p:cNvSpPr txBox="1"/>
+          <p:nvPr/>
+        </p:nvSpPr>
+        <p:spPr>
+          <a:xfrm>
+            <a:off x="640080" y="1280160"/>
+            <a:ext cx="10911535" cy="411480"/>
+          </a:xfrm>
+          <a:prstGeom prst="rect">
+            <a:avLst/>
+          </a:prstGeom>
+          <a:noFill/>
+        </p:spPr>
+        <p:txBody>
+          <a:bodyPr wrap="square" anchor="t" lIns="0" rIns="0" tIns="0" bIns="0">
+            <a:spAutoFit/>
+          </a:bodyPr>
+          <a:lstStyle/>
+          <a:p>
+            <a:pPr algn="ctr"/>
+            <a:r>
+              <a:rPr sz="1500" b="0" i="0">
+                <a:solidFill>
+                  <a:srgbClr val="2B2B2B"/>
+                </a:solidFill>
+                <a:latin typeface="Calibri"/>
+              </a:rPr>
+              <a:t>Sin fechas a propósito: aquí va </a:t>
+            </a:r>
+            <a:r>
+              <a:rPr sz="1500" b="1" i="0">
+                <a:solidFill>
+                  <a:srgbClr val="2B2B2B"/>
+                </a:solidFill>
+                <a:latin typeface="Calibri"/>
+              </a:rPr>
+              <a:t>en qué punto del curso</a:t>
+            </a:r>
+            <a:r>
+              <a:rPr sz="1500" b="0" i="0">
+                <a:solidFill>
+                  <a:srgbClr val="2B2B2B"/>
+                </a:solidFill>
+                <a:latin typeface="Calibri"/>
+              </a:rPr>
+              <a:t> cierra cada ítem · la ventana exacta la fija CDigital</a:t>
+            </a:r>
+          </a:p>
+        </p:txBody>
+      </p:sp>
+      <p:graphicFrame>
+        <p:nvGraphicFramePr>
+          <p:cNvPr id="5" name="Table 4"/>
+          <p:cNvGraphicFramePr>
+            <a:graphicFrameLocks noGrp="1"/>
+          </p:cNvGraphicFramePr>
+          <p:nvPr/>
+        </p:nvGraphicFramePr>
+        <p:xfrm>
+          <a:off x="640080" y="2011679"/>
+          <a:ext cx="10911533" cy="4297680"/>
+        </p:xfrm>
+        <a:graphic>
+          <a:graphicData uri="http://schemas.openxmlformats.org/drawingml/2006/table">
+            <a:tbl>
+              <a:tblPr>
+                <a:tableStyleId>{2D5ABB26-0587-4C30-8999-92F81FD0307C}</a:tableStyleId>
+              </a:tblPr>
+              <a:tblGrid>
+                <a:gridCol w="2659113"/>
+                <a:gridCol w="2659113"/>
+                <a:gridCol w="5593307"/>
+              </a:tblGrid>
+              <a:tr h="477520">
+                <a:tc>
+                  <a:txBody>
+                    <a:bodyPr/>
+                    <a:lstStyle/>
+                    <a:p>
+                      <a:pPr algn="l"/>
+                      <a:r>
+                        <a:rPr sz="1300" b="1" i="0">
+                          <a:solidFill>
+                            <a:srgbClr val="FFFFFF"/>
+                          </a:solidFill>
+                          <a:latin typeface="Calibri"/>
+                        </a:rPr>
+                        <a:t>Cierra en la semana de…</a:t>
+                      </a:r>
+                    </a:p>
+                  </a:txBody>
+                  <a:tcPr anchor="ctr" marL="109728" marR="91440" marT="36576" marB="36576">
+                    <a:solidFill>
+                      <a:srgbClr val="0C2340"/>
+                    </a:solidFill>
+                  </a:tcPr>
+                </a:tc>
+                <a:tc>
+                  <a:txBody>
+                    <a:bodyPr/>
+                    <a:lstStyle/>
+                    <a:p>
+                      <a:pPr algn="l"/>
+                      <a:r>
+                        <a:rPr sz="1300" b="1" i="0">
+                          <a:solidFill>
+                            <a:srgbClr val="FFFFFF"/>
+                          </a:solidFill>
+                          <a:latin typeface="Calibri"/>
+                        </a:rPr>
+                        <a:t>Entregable</a:t>
+                      </a:r>
+                    </a:p>
+                  </a:txBody>
+                  <a:tcPr anchor="ctr" marL="109728" marR="91440" marT="36576" marB="36576">
+                    <a:solidFill>
+                      <a:srgbClr val="0C2340"/>
+                    </a:solidFill>
+                  </a:tcPr>
+                </a:tc>
+                <a:tc>
+                  <a:txBody>
+                    <a:bodyPr/>
+                    <a:lstStyle/>
+                    <a:p>
+                      <a:pPr algn="l"/>
+                      <a:r>
+                        <a:rPr sz="1300" b="1" i="0">
+                          <a:solidFill>
+                            <a:srgbClr val="FFFFFF"/>
+                          </a:solidFill>
+                          <a:latin typeface="Calibri"/>
+                        </a:rPr>
+                        <a:t>Qué debes tener listo</a:t>
+                      </a:r>
+                    </a:p>
+                  </a:txBody>
+                  <a:tcPr anchor="ctr" marL="109728" marR="91440" marT="36576" marB="36576">
+                    <a:solidFill>
+                      <a:srgbClr val="0C2340"/>
+                    </a:solidFill>
+                  </a:tcPr>
+                </a:tc>
+              </a:tr>
+              <a:tr h="477520">
+                <a:tc>
+                  <a:txBody>
+                    <a:bodyPr/>
+                    <a:lstStyle/>
+                    <a:p>
+                      <a:pPr algn="l"/>
+                      <a:r>
+                        <a:rPr sz="1100" b="1" i="0">
+                          <a:solidFill>
+                            <a:srgbClr val="2B2B2B"/>
+                          </a:solidFill>
+                          <a:latin typeface="Calibri"/>
+                        </a:rPr>
+                        <a:t>Sesión 03</a:t>
+                      </a:r>
+                      <a:r>
+                        <a:rPr sz="1100" b="0" i="0">
+                          <a:solidFill>
+                            <a:srgbClr val="2B2B2B"/>
+                          </a:solidFill>
+                          <a:latin typeface="Calibri"/>
+                        </a:rPr>
+                        <a:t> · ya cerró</a:t>
+                      </a:r>
+                    </a:p>
+                  </a:txBody>
+                  <a:tcPr anchor="ctr" marL="109728" marR="91440" marT="36576" marB="36576">
+                    <a:solidFill>
+                      <a:srgbClr val="FFFFFF"/>
+                    </a:solidFill>
+                  </a:tcPr>
+                </a:tc>
+                <a:tc>
+                  <a:txBody>
+                    <a:bodyPr/>
+                    <a:lstStyle/>
+                    <a:p>
+                      <a:pPr algn="l"/>
+                      <a:r>
+                        <a:rPr sz="1100" b="1" i="0">
+                          <a:solidFill>
+                            <a:srgbClr val="2B2B2B"/>
+                          </a:solidFill>
+                          <a:latin typeface="Calibri"/>
+                        </a:rPr>
+                        <a:t>Quiz 1</a:t>
+                      </a:r>
+                      <a:r>
+                        <a:rPr sz="1100" b="0" i="0">
+                          <a:solidFill>
+                            <a:srgbClr val="2B2B2B"/>
+                          </a:solidFill>
+                          <a:latin typeface="Calibri"/>
+                        </a:rPr>
+                        <a:t> · Cuestionario · 6%</a:t>
+                      </a:r>
+                    </a:p>
+                  </a:txBody>
+                  <a:tcPr anchor="ctr" marL="109728" marR="91440" marT="36576" marB="36576">
+                    <a:solidFill>
+                      <a:srgbClr val="FFFFFF"/>
+                    </a:solidFill>
+                  </a:tcPr>
+                </a:tc>
+                <a:tc>
+                  <a:txBody>
+                    <a:bodyPr/>
+                    <a:lstStyle/>
+                    <a:p>
+                      <a:pPr algn="l"/>
+                      <a:r>
+                        <a:rPr sz="1100" b="0" i="0">
+                          <a:solidFill>
+                            <a:srgbClr val="2B2B2B"/>
+                          </a:solidFill>
+                          <a:latin typeface="Calibri"/>
+                        </a:rPr>
+                        <a:t>Repasa </a:t>
+                      </a:r>
+                      <a:r>
+                        <a:rPr sz="1100" b="1" i="0">
+                          <a:solidFill>
+                            <a:srgbClr val="2B2B2B"/>
+                          </a:solidFill>
+                          <a:latin typeface="Calibri"/>
+                        </a:rPr>
+                        <a:t>pregunta, objetivos y título</a:t>
+                      </a:r>
+                      <a:r>
+                        <a:rPr sz="1100" b="0" i="0">
+                          <a:solidFill>
+                            <a:srgbClr val="2B2B2B"/>
+                          </a:solidFill>
+                          <a:latin typeface="Calibri"/>
+                        </a:rPr>
+                        <a:t> y las variables de la pregunta-problema.</a:t>
+                      </a:r>
+                    </a:p>
+                  </a:txBody>
+                  <a:tcPr anchor="ctr" marL="109728" marR="91440" marT="36576" marB="36576">
+                    <a:solidFill>
+                      <a:srgbClr val="FFFFFF"/>
+                    </a:solidFill>
+                  </a:tcPr>
+                </a:tc>
+              </a:tr>
+              <a:tr h="477520">
+                <a:tc>
+                  <a:txBody>
+                    <a:bodyPr/>
+                    <a:lstStyle/>
+                    <a:p>
+                      <a:pPr algn="l"/>
+                      <a:r>
+                        <a:rPr sz="1100" b="1" i="0">
+                          <a:solidFill>
+                            <a:srgbClr val="2B2B2B"/>
+                          </a:solidFill>
+                          <a:latin typeface="Calibri"/>
+                        </a:rPr>
+                        <a:t>Sesión 06</a:t>
+                      </a:r>
+                      <a:r>
+                        <a:rPr sz="1100" b="0" i="0">
+                          <a:solidFill>
+                            <a:srgbClr val="2B2B2B"/>
+                          </a:solidFill>
+                          <a:latin typeface="Calibri"/>
+                        </a:rPr>
+                        <a:t> · pendiente</a:t>
+                      </a:r>
+                    </a:p>
+                  </a:txBody>
+                  <a:tcPr anchor="ctr" marL="109728" marR="91440" marT="36576" marB="36576">
+                    <a:solidFill>
+                      <a:srgbClr val="F2F2F2"/>
+                    </a:solidFill>
+                  </a:tcPr>
+                </a:tc>
+                <a:tc>
+                  <a:txBody>
+                    <a:bodyPr/>
+                    <a:lstStyle/>
+                    <a:p>
+                      <a:pPr algn="l"/>
+                      <a:r>
+                        <a:rPr sz="1100" b="1" i="0">
+                          <a:solidFill>
+                            <a:srgbClr val="2B2B2B"/>
+                          </a:solidFill>
+                          <a:latin typeface="Calibri"/>
+                        </a:rPr>
+                        <a:t>Parcial 1</a:t>
+                      </a:r>
+                      <a:r>
+                        <a:rPr sz="1100" b="0" i="0">
+                          <a:solidFill>
+                            <a:srgbClr val="2B2B2B"/>
+                          </a:solidFill>
+                          <a:latin typeface="Calibri"/>
+                        </a:rPr>
+                        <a:t> · Cuestionario · 24%</a:t>
+                      </a:r>
+                    </a:p>
+                  </a:txBody>
+                  <a:tcPr anchor="ctr" marL="109728" marR="91440" marT="36576" marB="36576">
+                    <a:solidFill>
+                      <a:srgbClr val="F2F2F2"/>
+                    </a:solidFill>
+                  </a:tcPr>
+                </a:tc>
+                <a:tc>
+                  <a:txBody>
+                    <a:bodyPr/>
+                    <a:lstStyle/>
+                    <a:p>
+                      <a:pPr algn="l"/>
+                      <a:r>
+                        <a:rPr sz="1100" b="0" i="0">
+                          <a:solidFill>
+                            <a:srgbClr val="2B2B2B"/>
+                          </a:solidFill>
+                          <a:latin typeface="Calibri"/>
+                        </a:rPr>
+                        <a:t>Estudia la </a:t>
+                      </a:r>
+                      <a:r>
+                        <a:rPr sz="1100" b="1" i="0">
+                          <a:solidFill>
+                            <a:srgbClr val="2B2B2B"/>
+                          </a:solidFill>
+                          <a:latin typeface="Calibri"/>
+                        </a:rPr>
+                        <a:t>introducción</a:t>
+                      </a:r>
+                      <a:r>
+                        <a:rPr sz="1100" b="0" i="0">
+                          <a:solidFill>
+                            <a:srgbClr val="2B2B2B"/>
+                          </a:solidFill>
+                          <a:latin typeface="Calibri"/>
+                        </a:rPr>
+                        <a:t>, los referentes Fase I y el instrumento ya diseñado.</a:t>
+                      </a:r>
+                    </a:p>
+                  </a:txBody>
+                  <a:tcPr anchor="ctr" marL="109728" marR="91440" marT="36576" marB="36576">
+                    <a:solidFill>
+                      <a:srgbClr val="F2F2F2"/>
+                    </a:solidFill>
+                  </a:tcPr>
+                </a:tc>
+              </a:tr>
+              <a:tr h="477520">
+                <a:tc>
+                  <a:txBody>
+                    <a:bodyPr/>
+                    <a:lstStyle/>
+                    <a:p>
+                      <a:pPr algn="l"/>
+                      <a:r>
+                        <a:rPr sz="1100" b="1" i="0">
+                          <a:solidFill>
+                            <a:srgbClr val="2B2B2B"/>
+                          </a:solidFill>
+                          <a:latin typeface="Calibri"/>
+                        </a:rPr>
+                        <a:t>Sesión 08</a:t>
+                      </a:r>
+                      <a:r>
+                        <a:rPr sz="1100" b="0" i="0">
+                          <a:solidFill>
+                            <a:srgbClr val="2B2B2B"/>
+                          </a:solidFill>
+                          <a:latin typeface="Calibri"/>
+                        </a:rPr>
+                        <a:t> · pendiente</a:t>
+                      </a:r>
+                    </a:p>
+                  </a:txBody>
+                  <a:tcPr anchor="ctr" marL="109728" marR="91440" marT="36576" marB="36576">
+                    <a:solidFill>
+                      <a:srgbClr val="FFFFFF"/>
+                    </a:solidFill>
+                  </a:tcPr>
+                </a:tc>
+                <a:tc>
+                  <a:txBody>
+                    <a:bodyPr/>
+                    <a:lstStyle/>
+                    <a:p>
+                      <a:pPr algn="l"/>
+                      <a:r>
+                        <a:rPr sz="1100" b="1" i="0">
+                          <a:solidFill>
+                            <a:srgbClr val="2B2B2B"/>
+                          </a:solidFill>
+                          <a:latin typeface="Calibri"/>
+                        </a:rPr>
+                        <a:t>Quiz 2</a:t>
+                      </a:r>
+                      <a:r>
+                        <a:rPr sz="1100" b="0" i="0">
+                          <a:solidFill>
+                            <a:srgbClr val="2B2B2B"/>
+                          </a:solidFill>
+                          <a:latin typeface="Calibri"/>
+                        </a:rPr>
+                        <a:t> · Cuestionario · 9%</a:t>
+                      </a:r>
+                    </a:p>
+                  </a:txBody>
+                  <a:tcPr anchor="ctr" marL="109728" marR="91440" marT="36576" marB="36576">
+                    <a:solidFill>
+                      <a:srgbClr val="FFFFFF"/>
+                    </a:solidFill>
+                  </a:tcPr>
+                </a:tc>
+                <a:tc>
+                  <a:txBody>
+                    <a:bodyPr/>
+                    <a:lstStyle/>
+                    <a:p>
+                      <a:pPr algn="l"/>
+                      <a:r>
+                        <a:rPr sz="1100" b="0" i="0">
+                          <a:solidFill>
+                            <a:srgbClr val="2B2B2B"/>
+                          </a:solidFill>
+                          <a:latin typeface="Calibri"/>
+                        </a:rPr>
+                        <a:t>Estudia </a:t>
+                      </a:r>
+                      <a:r>
+                        <a:rPr sz="1100" b="1" i="0">
+                          <a:solidFill>
+                            <a:srgbClr val="2B2B2B"/>
+                          </a:solidFill>
+                          <a:latin typeface="Calibri"/>
+                        </a:rPr>
+                        <a:t>comunidades de práctica</a:t>
+                      </a:r>
+                      <a:r>
+                        <a:rPr sz="1100" b="0" i="0">
+                          <a:solidFill>
+                            <a:srgbClr val="2B2B2B"/>
+                          </a:solidFill>
+                          <a:latin typeface="Calibri"/>
+                        </a:rPr>
+                        <a:t>, co-creación y análisis de datos.</a:t>
+                      </a:r>
+                    </a:p>
+                  </a:txBody>
+                  <a:tcPr anchor="ctr" marL="109728" marR="91440" marT="36576" marB="36576">
+                    <a:solidFill>
+                      <a:srgbClr val="FFFFFF"/>
+                    </a:solidFill>
+                  </a:tcPr>
+                </a:tc>
+              </a:tr>
+              <a:tr h="477520">
+                <a:tc>
+                  <a:txBody>
+                    <a:bodyPr/>
+                    <a:lstStyle/>
+                    <a:p>
+                      <a:pPr algn="l"/>
+                      <a:r>
+                        <a:rPr sz="1100" b="1" i="0">
+                          <a:solidFill>
+                            <a:srgbClr val="2B2B2B"/>
+                          </a:solidFill>
+                          <a:latin typeface="Calibri"/>
+                        </a:rPr>
+                        <a:t>Sesión 10</a:t>
+                      </a:r>
+                      <a:r>
+                        <a:rPr sz="1100" b="0" i="0">
+                          <a:solidFill>
+                            <a:srgbClr val="2B2B2B"/>
+                          </a:solidFill>
+                          <a:latin typeface="Calibri"/>
+                        </a:rPr>
+                        <a:t> · pendiente</a:t>
+                      </a:r>
+                    </a:p>
+                  </a:txBody>
+                  <a:tcPr anchor="ctr" marL="109728" marR="91440" marT="36576" marB="36576">
+                    <a:solidFill>
+                      <a:srgbClr val="F2F2F2"/>
+                    </a:solidFill>
+                  </a:tcPr>
+                </a:tc>
+                <a:tc>
+                  <a:txBody>
+                    <a:bodyPr/>
+                    <a:lstStyle/>
+                    <a:p>
+                      <a:pPr algn="l"/>
+                      <a:r>
+                        <a:rPr sz="1100" b="1" i="0">
+                          <a:solidFill>
+                            <a:srgbClr val="2B2B2B"/>
+                          </a:solidFill>
+                          <a:latin typeface="Calibri"/>
+                        </a:rPr>
+                        <a:t>Parcial 2</a:t>
+                      </a:r>
+                      <a:r>
+                        <a:rPr sz="1100" b="0" i="0">
+                          <a:solidFill>
+                            <a:srgbClr val="2B2B2B"/>
+                          </a:solidFill>
+                          <a:latin typeface="Calibri"/>
+                        </a:rPr>
+                        <a:t> · Cuestionario · 21%</a:t>
+                      </a:r>
+                    </a:p>
+                  </a:txBody>
+                  <a:tcPr anchor="ctr" marL="109728" marR="91440" marT="36576" marB="36576">
+                    <a:solidFill>
+                      <a:srgbClr val="F2F2F2"/>
+                    </a:solidFill>
+                  </a:tcPr>
+                </a:tc>
+                <a:tc>
+                  <a:txBody>
+                    <a:bodyPr/>
+                    <a:lstStyle/>
+                    <a:p>
+                      <a:pPr algn="l"/>
+                      <a:r>
+                        <a:rPr sz="1100" b="0" i="0">
+                          <a:solidFill>
+                            <a:srgbClr val="2B2B2B"/>
+                          </a:solidFill>
+                          <a:latin typeface="Calibri"/>
+                        </a:rPr>
+                        <a:t>Estudia el cierre del </a:t>
+                      </a:r>
+                      <a:r>
+                        <a:rPr sz="1100" b="1" i="0">
+                          <a:solidFill>
+                            <a:srgbClr val="2B2B2B"/>
+                          </a:solidFill>
+                          <a:latin typeface="Calibri"/>
+                        </a:rPr>
+                        <a:t>marco teórico</a:t>
+                      </a:r>
+                      <a:r>
+                        <a:rPr sz="1100" b="0" i="0">
+                          <a:solidFill>
+                            <a:srgbClr val="2B2B2B"/>
+                          </a:solidFill>
+                          <a:latin typeface="Calibri"/>
+                        </a:rPr>
+                        <a:t>, los resultados y la discusión.</a:t>
+                      </a:r>
+                    </a:p>
+                  </a:txBody>
+                  <a:tcPr anchor="ctr" marL="109728" marR="91440" marT="36576" marB="36576">
+                    <a:solidFill>
+                      <a:srgbClr val="F2F2F2"/>
+                    </a:solidFill>
+                  </a:tcPr>
+                </a:tc>
+              </a:tr>
+              <a:tr h="477520">
+                <a:tc>
+                  <a:txBody>
+                    <a:bodyPr/>
+                    <a:lstStyle/>
+                    <a:p>
+                      <a:pPr algn="l"/>
+                      <a:r>
+                        <a:rPr sz="1100" b="1" i="0">
+                          <a:solidFill>
+                            <a:srgbClr val="2B2B2B"/>
+                          </a:solidFill>
+                          <a:latin typeface="Calibri"/>
+                        </a:rPr>
+                        <a:t>Sesión 12</a:t>
+                      </a:r>
+                      <a:r>
+                        <a:rPr sz="1100" b="0" i="0">
+                          <a:solidFill>
+                            <a:srgbClr val="2B2B2B"/>
+                          </a:solidFill>
+                          <a:latin typeface="Calibri"/>
+                        </a:rPr>
+                        <a:t> · pendiente</a:t>
+                      </a:r>
+                    </a:p>
+                  </a:txBody>
+                  <a:tcPr anchor="ctr" marL="109728" marR="91440" marT="36576" marB="36576">
+                    <a:solidFill>
+                      <a:srgbClr val="FFFFFF"/>
+                    </a:solidFill>
+                  </a:tcPr>
+                </a:tc>
+                <a:tc>
+                  <a:txBody>
+                    <a:bodyPr/>
+                    <a:lstStyle/>
+                    <a:p>
+                      <a:pPr algn="l"/>
+                      <a:r>
+                        <a:rPr sz="1100" b="1" i="0">
+                          <a:solidFill>
+                            <a:srgbClr val="2B2B2B"/>
+                          </a:solidFill>
+                          <a:latin typeface="Calibri"/>
+                        </a:rPr>
+                        <a:t>Quiz 3</a:t>
+                      </a:r>
+                      <a:r>
+                        <a:rPr sz="1100" b="0" i="0">
+                          <a:solidFill>
+                            <a:srgbClr val="2B2B2B"/>
+                          </a:solidFill>
+                          <a:latin typeface="Calibri"/>
+                        </a:rPr>
+                        <a:t> · Cuestionario · 4%</a:t>
+                      </a:r>
+                    </a:p>
+                  </a:txBody>
+                  <a:tcPr anchor="ctr" marL="109728" marR="91440" marT="36576" marB="36576">
+                    <a:solidFill>
+                      <a:srgbClr val="FFFFFF"/>
+                    </a:solidFill>
+                  </a:tcPr>
+                </a:tc>
+                <a:tc>
+                  <a:txBody>
+                    <a:bodyPr/>
+                    <a:lstStyle/>
+                    <a:p>
+                      <a:pPr algn="l"/>
+                      <a:r>
+                        <a:rPr sz="1100" b="0" i="0">
+                          <a:solidFill>
+                            <a:srgbClr val="2B2B2B"/>
+                          </a:solidFill>
+                          <a:latin typeface="Calibri"/>
+                        </a:rPr>
+                        <a:t>Ten claros </a:t>
+                      </a:r>
+                      <a:r>
+                        <a:rPr sz="1100" b="1" i="0">
+                          <a:solidFill>
+                            <a:srgbClr val="2B2B2B"/>
+                          </a:solidFill>
+                          <a:latin typeface="Calibri"/>
+                        </a:rPr>
+                        <a:t>resumen</a:t>
+                      </a:r>
+                      <a:r>
+                        <a:rPr sz="1100" b="0" i="0">
+                          <a:solidFill>
+                            <a:srgbClr val="2B2B2B"/>
+                          </a:solidFill>
+                          <a:latin typeface="Calibri"/>
+                        </a:rPr>
+                        <a:t>, palabras clave UNESCO, póster y verificación antiplagio.</a:t>
+                      </a:r>
+                    </a:p>
+                  </a:txBody>
+                  <a:tcPr anchor="ctr" marL="109728" marR="91440" marT="36576" marB="36576">
+                    <a:solidFill>
+                      <a:srgbClr val="FFFFFF"/>
+                    </a:solidFill>
+                  </a:tcPr>
+                </a:tc>
+              </a:tr>
+              <a:tr h="477520">
+                <a:tc>
+                  <a:txBody>
+                    <a:bodyPr/>
+                    <a:lstStyle/>
+                    <a:p>
+                      <a:pPr algn="l"/>
+                      <a:r>
+                        <a:rPr sz="1100" b="1" i="0">
+                          <a:solidFill>
+                            <a:srgbClr val="2B2B2B"/>
+                          </a:solidFill>
+                          <a:latin typeface="Calibri"/>
+                        </a:rPr>
+                        <a:t>Sesión 13</a:t>
+                      </a:r>
+                      <a:r>
+                        <a:rPr sz="1100" b="0" i="0">
+                          <a:solidFill>
+                            <a:srgbClr val="2B2B2B"/>
+                          </a:solidFill>
+                          <a:latin typeface="Calibri"/>
+                        </a:rPr>
+                        <a:t> · pendiente</a:t>
+                      </a:r>
+                    </a:p>
+                  </a:txBody>
+                  <a:tcPr anchor="ctr" marL="109728" marR="91440" marT="36576" marB="36576">
+                    <a:solidFill>
+                      <a:srgbClr val="F2F2F2"/>
+                    </a:solidFill>
+                  </a:tcPr>
+                </a:tc>
+                <a:tc>
+                  <a:txBody>
+                    <a:bodyPr/>
+                    <a:lstStyle/>
+                    <a:p>
+                      <a:pPr algn="l"/>
+                      <a:r>
+                        <a:rPr sz="1100" b="1" i="0">
+                          <a:solidFill>
+                            <a:srgbClr val="2B2B2B"/>
+                          </a:solidFill>
+                          <a:latin typeface="Calibri"/>
+                        </a:rPr>
+                        <a:t>ACA Final</a:t>
+                      </a:r>
+                      <a:r>
+                        <a:rPr sz="1100" b="0" i="0">
+                          <a:solidFill>
+                            <a:srgbClr val="2B2B2B"/>
+                          </a:solidFill>
+                          <a:latin typeface="Calibri"/>
+                        </a:rPr>
+                        <a:t> · Tarea · 32%</a:t>
+                      </a:r>
+                    </a:p>
+                  </a:txBody>
+                  <a:tcPr anchor="ctr" marL="109728" marR="91440" marT="36576" marB="36576">
+                    <a:solidFill>
+                      <a:srgbClr val="F2F2F2"/>
+                    </a:solidFill>
+                  </a:tcPr>
+                </a:tc>
+                <a:tc>
+                  <a:txBody>
+                    <a:bodyPr/>
+                    <a:lstStyle/>
+                    <a:p>
+                      <a:pPr algn="l"/>
+                      <a:r>
+                        <a:rPr sz="1100" b="0" i="0">
+                          <a:solidFill>
+                            <a:srgbClr val="2B2B2B"/>
+                          </a:solidFill>
+                          <a:latin typeface="Calibri"/>
+                        </a:rPr>
+                        <a:t>Sube el </a:t>
+                      </a:r>
+                      <a:r>
+                        <a:rPr sz="1100" b="1" i="0">
+                          <a:solidFill>
+                            <a:srgbClr val="2B2B2B"/>
+                          </a:solidFill>
+                          <a:latin typeface="Calibri"/>
+                        </a:rPr>
+                        <a:t>documento final</a:t>
+                      </a:r>
+                      <a:r>
+                        <a:rPr sz="1100" b="0" i="0">
+                          <a:solidFill>
+                            <a:srgbClr val="2B2B2B"/>
+                          </a:solidFill>
+                          <a:latin typeface="Calibri"/>
+                        </a:rPr>
+                        <a:t> en plantilla APA CUN: mínimo 4.000 palabras y 50 referencias.</a:t>
+                      </a:r>
+                    </a:p>
+                  </a:txBody>
+                  <a:tcPr anchor="ctr" marL="109728" marR="91440" marT="36576" marB="36576">
+                    <a:solidFill>
+                      <a:srgbClr val="F2F2F2"/>
+                    </a:solidFill>
+                  </a:tcPr>
+                </a:tc>
+              </a:tr>
+              <a:tr h="477520">
+                <a:tc>
+                  <a:txBody>
+                    <a:bodyPr/>
+                    <a:lstStyle/>
+                    <a:p>
+                      <a:pPr algn="l"/>
+                      <a:r>
+                        <a:rPr sz="1100" b="1" i="0">
+                          <a:solidFill>
+                            <a:srgbClr val="2B2B2B"/>
+                          </a:solidFill>
+                          <a:latin typeface="Calibri"/>
+                        </a:rPr>
+                        <a:t>Sesión 14</a:t>
+                      </a:r>
+                      <a:r>
+                        <a:rPr sz="1100" b="0" i="0">
+                          <a:solidFill>
+                            <a:srgbClr val="2B2B2B"/>
+                          </a:solidFill>
+                          <a:latin typeface="Calibri"/>
+                        </a:rPr>
+                        <a:t> · pendiente</a:t>
+                      </a:r>
+                    </a:p>
+                  </a:txBody>
+                  <a:tcPr anchor="ctr" marL="109728" marR="91440" marT="36576" marB="36576">
+                    <a:solidFill>
+                      <a:srgbClr val="FFFFFF"/>
+                    </a:solidFill>
+                  </a:tcPr>
+                </a:tc>
+                <a:tc>
+                  <a:txBody>
+                    <a:bodyPr/>
+                    <a:lstStyle/>
+                    <a:p>
+                      <a:pPr algn="l"/>
+                      <a:r>
+                        <a:rPr sz="1100" b="1" i="0">
+                          <a:solidFill>
+                            <a:srgbClr val="2B2B2B"/>
+                          </a:solidFill>
+                          <a:latin typeface="Calibri"/>
+                        </a:rPr>
+                        <a:t>Autoevaluación</a:t>
+                      </a:r>
+                      <a:r>
+                        <a:rPr sz="1100" b="0" i="0">
+                          <a:solidFill>
+                            <a:srgbClr val="2B2B2B"/>
+                          </a:solidFill>
+                          <a:latin typeface="Calibri"/>
+                        </a:rPr>
+                        <a:t> · Cuestionario · 2%</a:t>
+                      </a:r>
+                    </a:p>
+                  </a:txBody>
+                  <a:tcPr anchor="ctr" marL="109728" marR="91440" marT="36576" marB="36576">
+                    <a:solidFill>
+                      <a:srgbClr val="FFFFFF"/>
+                    </a:solidFill>
+                  </a:tcPr>
+                </a:tc>
+                <a:tc>
+                  <a:txBody>
+                    <a:bodyPr/>
+                    <a:lstStyle/>
+                    <a:p>
+                      <a:pPr algn="l"/>
+                      <a:r>
+                        <a:rPr sz="1100" b="0" i="0">
+                          <a:solidFill>
+                            <a:srgbClr val="2B2B2B"/>
+                          </a:solidFill>
+                          <a:latin typeface="Calibri"/>
+                        </a:rPr>
+                        <a:t>Diligénciala </a:t>
+                      </a:r>
+                      <a:r>
+                        <a:rPr sz="1100" b="1" i="0">
+                          <a:solidFill>
+                            <a:srgbClr val="2B2B2B"/>
+                          </a:solidFill>
+                          <a:latin typeface="Calibri"/>
+                        </a:rPr>
+                        <a:t>tú</a:t>
+                      </a:r>
+                      <a:r>
+                        <a:rPr sz="1100" b="0" i="0">
+                          <a:solidFill>
+                            <a:srgbClr val="2B2B2B"/>
+                          </a:solidFill>
+                          <a:latin typeface="Calibri"/>
+                        </a:rPr>
+                        <a:t>, dentro de su ventana, sobre tu participación real.</a:t>
+                      </a:r>
+                    </a:p>
+                  </a:txBody>
+                  <a:tcPr anchor="ctr" marL="109728" marR="91440" marT="36576" marB="36576">
+                    <a:solidFill>
+                      <a:srgbClr val="FFFFFF"/>
+                    </a:solidFill>
+                  </a:tcPr>
+                </a:tc>
+              </a:tr>
+              <a:tr h="477520">
+                <a:tc>
+                  <a:txBody>
+                    <a:bodyPr/>
+                    <a:lstStyle/>
+                    <a:p>
+                      <a:pPr algn="l"/>
+                      <a:r>
+                        <a:rPr sz="1100" b="1" i="0">
+                          <a:solidFill>
+                            <a:srgbClr val="2B2B2B"/>
+                          </a:solidFill>
+                          <a:latin typeface="Calibri"/>
+                        </a:rPr>
+                        <a:t>Sesión 14</a:t>
+                      </a:r>
+                      <a:r>
+                        <a:rPr sz="1100" b="0" i="0">
+                          <a:solidFill>
+                            <a:srgbClr val="2B2B2B"/>
+                          </a:solidFill>
+                          <a:latin typeface="Calibri"/>
+                        </a:rPr>
+                        <a:t> · pendiente</a:t>
+                      </a:r>
+                    </a:p>
+                  </a:txBody>
+                  <a:tcPr anchor="ctr" marL="109728" marR="91440" marT="36576" marB="36576">
+                    <a:solidFill>
+                      <a:srgbClr val="F2F2F2"/>
+                    </a:solidFill>
+                  </a:tcPr>
+                </a:tc>
+                <a:tc>
+                  <a:txBody>
+                    <a:bodyPr/>
+                    <a:lstStyle/>
+                    <a:p>
+                      <a:pPr algn="l"/>
+                      <a:r>
+                        <a:rPr sz="1100" b="1" i="0">
+                          <a:solidFill>
+                            <a:srgbClr val="2B2B2B"/>
+                          </a:solidFill>
+                          <a:latin typeface="Calibri"/>
+                        </a:rPr>
+                        <a:t>Coevaluación</a:t>
+                      </a:r>
+                      <a:r>
+                        <a:rPr sz="1100" b="0" i="0">
+                          <a:solidFill>
+                            <a:srgbClr val="2B2B2B"/>
+                          </a:solidFill>
+                          <a:latin typeface="Calibri"/>
+                        </a:rPr>
+                        <a:t> · Foro · 2%</a:t>
+                      </a:r>
+                    </a:p>
+                  </a:txBody>
+                  <a:tcPr anchor="ctr" marL="109728" marR="91440" marT="36576" marB="36576">
+                    <a:solidFill>
+                      <a:srgbClr val="F2F2F2"/>
+                    </a:solidFill>
+                  </a:tcPr>
+                </a:tc>
+                <a:tc>
+                  <a:txBody>
+                    <a:bodyPr/>
+                    <a:lstStyle/>
+                    <a:p>
+                      <a:pPr algn="l"/>
+                      <a:r>
+                        <a:rPr sz="1100" b="1" i="0">
+                          <a:solidFill>
+                            <a:srgbClr val="2B2B2B"/>
+                          </a:solidFill>
+                          <a:latin typeface="Calibri"/>
+                        </a:rPr>
+                        <a:t>Publica</a:t>
+                      </a:r>
+                      <a:r>
+                        <a:rPr sz="1100" b="0" i="0">
+                          <a:solidFill>
+                            <a:srgbClr val="2B2B2B"/>
+                          </a:solidFill>
+                          <a:latin typeface="Calibri"/>
+                        </a:rPr>
+                        <a:t> tu aporte dentro de la ventana: un borrador sin enviar no cuenta.</a:t>
+                      </a:r>
+                    </a:p>
+                  </a:txBody>
+                  <a:tcPr anchor="ctr" marL="109728" marR="91440" marT="36576" marB="36576">
+                    <a:solidFill>
+                      <a:srgbClr val="F2F2F2"/>
+                    </a:solidFill>
+                  </a:tcPr>
+                </a:tc>
+              </a:tr>
+            </a:tbl>
+          </a:graphicData>
+        </a:graphic>
+      </p:graphicFrame>
+      <p:sp>
+        <p:nvSpPr>
+          <p:cNvPr id="6" name="TextBox 5"/>
+          <p:cNvSpPr txBox="1"/>
+          <p:nvPr/>
+        </p:nvSpPr>
+        <p:spPr>
+          <a:xfrm>
+            <a:off x="640080" y="6080760"/>
+            <a:ext cx="10911535" cy="548640"/>
+          </a:xfrm>
+          <a:prstGeom prst="rect">
+            <a:avLst/>
+          </a:prstGeom>
+          <a:noFill/>
+        </p:spPr>
+        <p:txBody>
+          <a:bodyPr wrap="square" anchor="t" lIns="0" rIns="0" tIns="0" bIns="0">
+            <a:spAutoFit/>
+          </a:bodyPr>
+          <a:lstStyle/>
+          <a:p>
+            <a:r>
+              <a:rPr sz="1200" b="0" i="1">
+                <a:solidFill>
+                  <a:srgbClr val="2B2B2B"/>
+                </a:solidFill>
+                <a:latin typeface="Calibri"/>
+              </a:rPr>
+              <a:t>Esta misma tabla va al final de todas las sesiones. La </a:t>
+            </a:r>
+            <a:r>
+              <a:rPr sz="1200" b="1" i="1">
+                <a:solidFill>
+                  <a:srgbClr val="2B2B2B"/>
+                </a:solidFill>
+                <a:latin typeface="Calibri"/>
+              </a:rPr>
+              <a:t>fecha</a:t>
+            </a:r>
+            <a:r>
+              <a:rPr sz="1200" b="0" i="1">
+                <a:solidFill>
+                  <a:srgbClr val="2B2B2B"/>
+                </a:solidFill>
+                <a:latin typeface="Calibri"/>
+              </a:rPr>
+              <a:t> de cada ventana está en el enunciado del ítem (`Clases/Recursos/ACAs/`) y en el aula: si el aula y cualquier otro material se contradicen, </a:t>
+            </a:r>
+            <a:r>
+              <a:rPr sz="1200" b="1" i="1">
+                <a:solidFill>
+                  <a:srgbClr val="2B2B2B"/>
+                </a:solidFill>
+                <a:latin typeface="Calibri"/>
+              </a:rPr>
+              <a:t>manda el aula</a:t>
+            </a:r>
+            <a:r>
+              <a:rPr sz="1200" b="0" i="1">
+                <a:solidFill>
+                  <a:srgbClr val="2B2B2B"/>
+                </a:solidFill>
+                <a:latin typeface="Calibri"/>
+              </a:rPr>
+              <a:t>.</a:t>
+            </a:r>
+          </a:p>
+        </p:txBody>
+      </p:sp>
+      <p:sp>
+        <p:nvSpPr>
+          <p:cNvPr id="7" name="TextBox 6"/>
+          <p:cNvSpPr txBox="1"/>
+          <p:nvPr/>
+        </p:nvSpPr>
+        <p:spPr>
+          <a:xfrm>
+            <a:off x="11094415" y="6446520"/>
+            <a:ext cx="548640" cy="274320"/>
+          </a:xfrm>
+          <a:prstGeom prst="rect">
+            <a:avLst/>
+          </a:prstGeom>
+          <a:noFill/>
+        </p:spPr>
+        <p:txBody>
+          <a:bodyPr wrap="square" anchor="t" lIns="0" rIns="0" tIns="0" bIns="0">
+            <a:spAutoFit/>
+          </a:bodyPr>
+          <a:lstStyle/>
+          <a:p>
+            <a:pPr algn="r"/>
+            <a:r>
+              <a:rPr sz="1000" b="1" i="0">
+                <a:solidFill>
+                  <a:srgbClr val="8F989D"/>
+                </a:solidFill>
+                <a:latin typeface="Calibri"/>
+              </a:rPr>
+              <a:t>23</a:t>
+            </a:r>
+          </a:p>
+        </p:txBody>
+      </p:sp>
+    </p:spTree>
+  </p:cSld>
+  <p:clrMapOvr>
+    <a:masterClrMapping/>
+  </p:clrMapOvr>
+</p:sld>
+</file>
+
+<file path=ppt/slides/slide24.xml><?xml version="1.0" encoding="utf-8"?>
 <p:sld xmlns:a="http://schemas.openxmlformats.org/drawingml/2006/main" xmlns:p="http://schemas.openxmlformats.org/presentationml/2006/main" xmlns:r="http://schemas.openxmlformats.org/officeDocument/2006/relationships">
   <p:cSld>
     <p:bg>
@@ -12115,7 +13606,7 @@
                 </a:solidFill>
                 <a:latin typeface="Calibri"/>
               </a:rPr>
-              <a:t> en la sección de Metodología del artículo. El jurado las busca.</a:t>
+              <a:t> en la sección de Metodología del documento. El jurado las busca.</a:t>
             </a:r>
           </a:p>
         </p:txBody>
